--- a/Dwayne Johnson.pptx
+++ b/Dwayne Johnson.pptx
@@ -105,6 +105,11 @@
       </a:defRPr>
     </a:lvl9pPr>
   </p:defaultTextStyle>
+  <p:extLst>
+    <p:ext uri="{EFAFB233-063F-42B5-8137-9DF3F51BA10A}">
+      <p15:sldGuideLst xmlns:p15="http://schemas.microsoft.com/office/powerpoint/2012/main"/>
+    </p:ext>
+  </p:extLst>
 </p:presentation>
 </file>
 
@@ -3340,10 +3345,16 @@
         </p:nvSpPr>
         <p:spPr/>
         <p:txBody>
-          <a:bodyPr/>
-          <a:lstStyle/>
-          <a:p>
-            <a:endParaRPr lang="hu-HU"/>
+          <a:bodyPr>
+            <a:normAutofit/>
+          </a:bodyPr>
+          <a:lstStyle/>
+          <a:p>
+            <a:endParaRPr lang="hu-HU" sz="4000" dirty="0">
+              <a:solidFill>
+                <a:srgbClr val="92D050"/>
+              </a:solidFill>
+            </a:endParaRPr>
           </a:p>
         </p:txBody>
       </p:sp>
@@ -3368,7 +3379,89 @@
           <a:bodyPr/>
           <a:lstStyle/>
           <a:p>
-            <a:endParaRPr lang="hu-HU"/>
+            <a:endParaRPr lang="hu-HU" dirty="0"/>
+          </a:p>
+        </p:txBody>
+      </p:sp>
+      <p:pic>
+        <p:nvPicPr>
+          <p:cNvPr id="5" name="Kép 4">
+            <a:extLst>
+              <a:ext uri="{FF2B5EF4-FFF2-40B4-BE49-F238E27FC236}">
+                <a16:creationId xmlns:a16="http://schemas.microsoft.com/office/drawing/2014/main" id="{C526D2E6-3DFB-4051-A7CF-DF720B1DD7EE}"/>
+              </a:ext>
+            </a:extLst>
+          </p:cNvPr>
+          <p:cNvPicPr>
+            <a:picLocks noChangeAspect="1"/>
+          </p:cNvPicPr>
+          <p:nvPr/>
+        </p:nvPicPr>
+        <p:blipFill>
+          <a:blip r:embed="rId2">
+            <a:extLst>
+              <a:ext uri="{28A0092B-C50C-407E-A947-70E740481C1C}">
+                <a14:useLocalDpi xmlns:a14="http://schemas.microsoft.com/office/drawing/2010/main" val="0"/>
+              </a:ext>
+            </a:extLst>
+          </a:blip>
+          <a:stretch>
+            <a:fillRect/>
+          </a:stretch>
+        </p:blipFill>
+        <p:spPr>
+          <a:xfrm>
+            <a:off x="-147740" y="0"/>
+            <a:ext cx="12213905" cy="6870321"/>
+          </a:xfrm>
+          <a:prstGeom prst="rect">
+            <a:avLst/>
+          </a:prstGeom>
+        </p:spPr>
+      </p:pic>
+      <p:sp>
+        <p:nvSpPr>
+          <p:cNvPr id="6" name="Téglalap 5">
+            <a:extLst>
+              <a:ext uri="{FF2B5EF4-FFF2-40B4-BE49-F238E27FC236}">
+                <a16:creationId xmlns:a16="http://schemas.microsoft.com/office/drawing/2014/main" id="{082C436B-3168-41E6-86C6-65C90DA7AB3A}"/>
+              </a:ext>
+            </a:extLst>
+          </p:cNvPr>
+          <p:cNvSpPr/>
+          <p:nvPr/>
+        </p:nvSpPr>
+        <p:spPr>
+          <a:xfrm>
+            <a:off x="7572665" y="540140"/>
+            <a:ext cx="3669210" cy="369332"/>
+          </a:xfrm>
+          <a:prstGeom prst="rect">
+            <a:avLst/>
+          </a:prstGeom>
+        </p:spPr>
+        <p:txBody>
+          <a:bodyPr wrap="none">
+            <a:spAutoFit/>
+          </a:bodyPr>
+          <a:lstStyle/>
+          <a:p>
+            <a:r>
+              <a:rPr lang="hu-HU" dirty="0" err="1">
+                <a:solidFill>
+                  <a:schemeClr val="bg1"/>
+                </a:solidFill>
+              </a:rPr>
+              <a:t>Dwayne</a:t>
+            </a:r>
+            <a:r>
+              <a:rPr lang="hu-HU" dirty="0">
+                <a:solidFill>
+                  <a:schemeClr val="bg1"/>
+                </a:solidFill>
+              </a:rPr>
+              <a:t> Johnson rajongói oldal 2025</a:t>
+            </a:r>
           </a:p>
         </p:txBody>
       </p:sp>

--- a/Dwayne Johnson.pptx
+++ b/Dwayne Johnson.pptx
@@ -7,6 +7,8 @@
   <p:sldIdLst>
     <p:sldId id="256" r:id="rId2"/>
     <p:sldId id="257" r:id="rId3"/>
+    <p:sldId id="258" r:id="rId4"/>
+    <p:sldId id="259" r:id="rId5"/>
   </p:sldIdLst>
   <p:sldSz cx="12192000" cy="6858000"/>
   <p:notesSz cx="6858000" cy="9144000"/>
@@ -260,7 +262,7 @@
           <a:p>
             <a:fld id="{27C52E7B-312F-4F68-B050-DB38E8C31169}" type="datetimeFigureOut">
               <a:rPr lang="hu-HU" smtClean="0"/>
-              <a:t>2025.02.13</a:t>
+              <a:t>2025. 02. 15.</a:t>
             </a:fld>
             <a:endParaRPr lang="hu-HU"/>
           </a:p>
@@ -330,6 +332,18 @@
   <p:clrMapOvr>
     <a:masterClrMapping/>
   </p:clrMapOvr>
+  <mc:AlternateContent xmlns:mc="http://schemas.openxmlformats.org/markup-compatibility/2006">
+    <mc:Choice xmlns:p159="http://schemas.microsoft.com/office/powerpoint/2015/09/main" Requires="p159">
+      <p:transition xmlns:p14="http://schemas.microsoft.com/office/powerpoint/2010/main" spd="slow" p14:dur="2000">
+        <p159:morph option="byObject"/>
+      </p:transition>
+    </mc:Choice>
+    <mc:Fallback>
+      <p:transition spd="slow">
+        <p:fade/>
+      </p:transition>
+    </mc:Fallback>
+  </mc:AlternateContent>
 </p:sldLayout>
 </file>
 
@@ -458,7 +472,7 @@
           <a:p>
             <a:fld id="{27C52E7B-312F-4F68-B050-DB38E8C31169}" type="datetimeFigureOut">
               <a:rPr lang="hu-HU" smtClean="0"/>
-              <a:t>2025.02.13</a:t>
+              <a:t>2025. 02. 15.</a:t>
             </a:fld>
             <a:endParaRPr lang="hu-HU"/>
           </a:p>
@@ -528,6 +542,18 @@
   <p:clrMapOvr>
     <a:masterClrMapping/>
   </p:clrMapOvr>
+  <mc:AlternateContent xmlns:mc="http://schemas.openxmlformats.org/markup-compatibility/2006">
+    <mc:Choice xmlns:p159="http://schemas.microsoft.com/office/powerpoint/2015/09/main" Requires="p159">
+      <p:transition xmlns:p14="http://schemas.microsoft.com/office/powerpoint/2010/main" spd="slow" p14:dur="2000">
+        <p159:morph option="byObject"/>
+      </p:transition>
+    </mc:Choice>
+    <mc:Fallback>
+      <p:transition spd="slow">
+        <p:fade/>
+      </p:transition>
+    </mc:Fallback>
+  </mc:AlternateContent>
 </p:sldLayout>
 </file>
 
@@ -666,7 +692,7 @@
           <a:p>
             <a:fld id="{27C52E7B-312F-4F68-B050-DB38E8C31169}" type="datetimeFigureOut">
               <a:rPr lang="hu-HU" smtClean="0"/>
-              <a:t>2025.02.13</a:t>
+              <a:t>2025. 02. 15.</a:t>
             </a:fld>
             <a:endParaRPr lang="hu-HU"/>
           </a:p>
@@ -736,6 +762,18 @@
   <p:clrMapOvr>
     <a:masterClrMapping/>
   </p:clrMapOvr>
+  <mc:AlternateContent xmlns:mc="http://schemas.openxmlformats.org/markup-compatibility/2006">
+    <mc:Choice xmlns:p159="http://schemas.microsoft.com/office/powerpoint/2015/09/main" Requires="p159">
+      <p:transition xmlns:p14="http://schemas.microsoft.com/office/powerpoint/2010/main" spd="slow" p14:dur="2000">
+        <p159:morph option="byObject"/>
+      </p:transition>
+    </mc:Choice>
+    <mc:Fallback>
+      <p:transition spd="slow">
+        <p:fade/>
+      </p:transition>
+    </mc:Fallback>
+  </mc:AlternateContent>
 </p:sldLayout>
 </file>
 
@@ -864,7 +902,7 @@
           <a:p>
             <a:fld id="{27C52E7B-312F-4F68-B050-DB38E8C31169}" type="datetimeFigureOut">
               <a:rPr lang="hu-HU" smtClean="0"/>
-              <a:t>2025.02.13</a:t>
+              <a:t>2025. 02. 15.</a:t>
             </a:fld>
             <a:endParaRPr lang="hu-HU"/>
           </a:p>
@@ -934,6 +972,18 @@
   <p:clrMapOvr>
     <a:masterClrMapping/>
   </p:clrMapOvr>
+  <mc:AlternateContent xmlns:mc="http://schemas.openxmlformats.org/markup-compatibility/2006">
+    <mc:Choice xmlns:p159="http://schemas.microsoft.com/office/powerpoint/2015/09/main" Requires="p159">
+      <p:transition xmlns:p14="http://schemas.microsoft.com/office/powerpoint/2010/main" spd="slow" p14:dur="2000">
+        <p159:morph option="byObject"/>
+      </p:transition>
+    </mc:Choice>
+    <mc:Fallback>
+      <p:transition spd="slow">
+        <p:fade/>
+      </p:transition>
+    </mc:Fallback>
+  </mc:AlternateContent>
 </p:sldLayout>
 </file>
 
@@ -1139,7 +1189,7 @@
           <a:p>
             <a:fld id="{27C52E7B-312F-4F68-B050-DB38E8C31169}" type="datetimeFigureOut">
               <a:rPr lang="hu-HU" smtClean="0"/>
-              <a:t>2025.02.13</a:t>
+              <a:t>2025. 02. 15.</a:t>
             </a:fld>
             <a:endParaRPr lang="hu-HU"/>
           </a:p>
@@ -1209,6 +1259,18 @@
   <p:clrMapOvr>
     <a:masterClrMapping/>
   </p:clrMapOvr>
+  <mc:AlternateContent xmlns:mc="http://schemas.openxmlformats.org/markup-compatibility/2006">
+    <mc:Choice xmlns:p159="http://schemas.microsoft.com/office/powerpoint/2015/09/main" Requires="p159">
+      <p:transition xmlns:p14="http://schemas.microsoft.com/office/powerpoint/2010/main" spd="slow" p14:dur="2000">
+        <p159:morph option="byObject"/>
+      </p:transition>
+    </mc:Choice>
+    <mc:Fallback>
+      <p:transition spd="slow">
+        <p:fade/>
+      </p:transition>
+    </mc:Fallback>
+  </mc:AlternateContent>
 </p:sldLayout>
 </file>
 
@@ -1404,7 +1466,7 @@
           <a:p>
             <a:fld id="{27C52E7B-312F-4F68-B050-DB38E8C31169}" type="datetimeFigureOut">
               <a:rPr lang="hu-HU" smtClean="0"/>
-              <a:t>2025.02.13</a:t>
+              <a:t>2025. 02. 15.</a:t>
             </a:fld>
             <a:endParaRPr lang="hu-HU"/>
           </a:p>
@@ -1474,6 +1536,18 @@
   <p:clrMapOvr>
     <a:masterClrMapping/>
   </p:clrMapOvr>
+  <mc:AlternateContent xmlns:mc="http://schemas.openxmlformats.org/markup-compatibility/2006">
+    <mc:Choice xmlns:p159="http://schemas.microsoft.com/office/powerpoint/2015/09/main" Requires="p159">
+      <p:transition xmlns:p14="http://schemas.microsoft.com/office/powerpoint/2010/main" spd="slow" p14:dur="2000">
+        <p159:morph option="byObject"/>
+      </p:transition>
+    </mc:Choice>
+    <mc:Fallback>
+      <p:transition spd="slow">
+        <p:fade/>
+      </p:transition>
+    </mc:Fallback>
+  </mc:AlternateContent>
 </p:sldLayout>
 </file>
 
@@ -1816,7 +1890,7 @@
           <a:p>
             <a:fld id="{27C52E7B-312F-4F68-B050-DB38E8C31169}" type="datetimeFigureOut">
               <a:rPr lang="hu-HU" smtClean="0"/>
-              <a:t>2025.02.13</a:t>
+              <a:t>2025. 02. 15.</a:t>
             </a:fld>
             <a:endParaRPr lang="hu-HU"/>
           </a:p>
@@ -1886,6 +1960,18 @@
   <p:clrMapOvr>
     <a:masterClrMapping/>
   </p:clrMapOvr>
+  <mc:AlternateContent xmlns:mc="http://schemas.openxmlformats.org/markup-compatibility/2006">
+    <mc:Choice xmlns:p159="http://schemas.microsoft.com/office/powerpoint/2015/09/main" Requires="p159">
+      <p:transition xmlns:p14="http://schemas.microsoft.com/office/powerpoint/2010/main" spd="slow" p14:dur="2000">
+        <p159:morph option="byObject"/>
+      </p:transition>
+    </mc:Choice>
+    <mc:Fallback>
+      <p:transition spd="slow">
+        <p:fade/>
+      </p:transition>
+    </mc:Fallback>
+  </mc:AlternateContent>
 </p:sldLayout>
 </file>
 
@@ -1957,7 +2043,7 @@
           <a:p>
             <a:fld id="{27C52E7B-312F-4F68-B050-DB38E8C31169}" type="datetimeFigureOut">
               <a:rPr lang="hu-HU" smtClean="0"/>
-              <a:t>2025.02.13</a:t>
+              <a:t>2025. 02. 15.</a:t>
             </a:fld>
             <a:endParaRPr lang="hu-HU"/>
           </a:p>
@@ -2027,6 +2113,18 @@
   <p:clrMapOvr>
     <a:masterClrMapping/>
   </p:clrMapOvr>
+  <mc:AlternateContent xmlns:mc="http://schemas.openxmlformats.org/markup-compatibility/2006">
+    <mc:Choice xmlns:p159="http://schemas.microsoft.com/office/powerpoint/2015/09/main" Requires="p159">
+      <p:transition xmlns:p14="http://schemas.microsoft.com/office/powerpoint/2010/main" spd="slow" p14:dur="2000">
+        <p159:morph option="byObject"/>
+      </p:transition>
+    </mc:Choice>
+    <mc:Fallback>
+      <p:transition spd="slow">
+        <p:fade/>
+      </p:transition>
+    </mc:Fallback>
+  </mc:AlternateContent>
 </p:sldLayout>
 </file>
 
@@ -2070,7 +2168,7 @@
           <a:p>
             <a:fld id="{27C52E7B-312F-4F68-B050-DB38E8C31169}" type="datetimeFigureOut">
               <a:rPr lang="hu-HU" smtClean="0"/>
-              <a:t>2025.02.13</a:t>
+              <a:t>2025. 02. 15.</a:t>
             </a:fld>
             <a:endParaRPr lang="hu-HU"/>
           </a:p>
@@ -2140,6 +2238,18 @@
   <p:clrMapOvr>
     <a:masterClrMapping/>
   </p:clrMapOvr>
+  <mc:AlternateContent xmlns:mc="http://schemas.openxmlformats.org/markup-compatibility/2006">
+    <mc:Choice xmlns:p159="http://schemas.microsoft.com/office/powerpoint/2015/09/main" Requires="p159">
+      <p:transition xmlns:p14="http://schemas.microsoft.com/office/powerpoint/2010/main" spd="slow" p14:dur="2000">
+        <p159:morph option="byObject"/>
+      </p:transition>
+    </mc:Choice>
+    <mc:Fallback>
+      <p:transition spd="slow">
+        <p:fade/>
+      </p:transition>
+    </mc:Fallback>
+  </mc:AlternateContent>
 </p:sldLayout>
 </file>
 
@@ -2381,7 +2491,7 @@
           <a:p>
             <a:fld id="{27C52E7B-312F-4F68-B050-DB38E8C31169}" type="datetimeFigureOut">
               <a:rPr lang="hu-HU" smtClean="0"/>
-              <a:t>2025.02.13</a:t>
+              <a:t>2025. 02. 15.</a:t>
             </a:fld>
             <a:endParaRPr lang="hu-HU"/>
           </a:p>
@@ -2451,6 +2561,18 @@
   <p:clrMapOvr>
     <a:masterClrMapping/>
   </p:clrMapOvr>
+  <mc:AlternateContent xmlns:mc="http://schemas.openxmlformats.org/markup-compatibility/2006">
+    <mc:Choice xmlns:p159="http://schemas.microsoft.com/office/powerpoint/2015/09/main" Requires="p159">
+      <p:transition xmlns:p14="http://schemas.microsoft.com/office/powerpoint/2010/main" spd="slow" p14:dur="2000">
+        <p159:morph option="byObject"/>
+      </p:transition>
+    </mc:Choice>
+    <mc:Fallback>
+      <p:transition spd="slow">
+        <p:fade/>
+      </p:transition>
+    </mc:Fallback>
+  </mc:AlternateContent>
 </p:sldLayout>
 </file>
 
@@ -2669,7 +2791,7 @@
           <a:p>
             <a:fld id="{27C52E7B-312F-4F68-B050-DB38E8C31169}" type="datetimeFigureOut">
               <a:rPr lang="hu-HU" smtClean="0"/>
-              <a:t>2025.02.13</a:t>
+              <a:t>2025. 02. 15.</a:t>
             </a:fld>
             <a:endParaRPr lang="hu-HU"/>
           </a:p>
@@ -2739,6 +2861,18 @@
   <p:clrMapOvr>
     <a:masterClrMapping/>
   </p:clrMapOvr>
+  <mc:AlternateContent xmlns:mc="http://schemas.openxmlformats.org/markup-compatibility/2006">
+    <mc:Choice xmlns:p159="http://schemas.microsoft.com/office/powerpoint/2015/09/main" Requires="p159">
+      <p:transition xmlns:p14="http://schemas.microsoft.com/office/powerpoint/2010/main" spd="slow" p14:dur="2000">
+        <p159:morph option="byObject"/>
+      </p:transition>
+    </mc:Choice>
+    <mc:Fallback>
+      <p:transition spd="slow">
+        <p:fade/>
+      </p:transition>
+    </mc:Fallback>
+  </mc:AlternateContent>
 </p:sldLayout>
 </file>
 
@@ -2910,7 +3044,7 @@
           <a:p>
             <a:fld id="{27C52E7B-312F-4F68-B050-DB38E8C31169}" type="datetimeFigureOut">
               <a:rPr lang="hu-HU" smtClean="0"/>
-              <a:t>2025.02.13</a:t>
+              <a:t>2025. 02. 15.</a:t>
             </a:fld>
             <a:endParaRPr lang="hu-HU"/>
           </a:p>
@@ -3027,6 +3161,18 @@
     <p:sldLayoutId id="2147483658" r:id="rId10"/>
     <p:sldLayoutId id="2147483659" r:id="rId11"/>
   </p:sldLayoutIdLst>
+  <mc:AlternateContent xmlns:mc="http://schemas.openxmlformats.org/markup-compatibility/2006">
+    <mc:Choice xmlns:p159="http://schemas.microsoft.com/office/powerpoint/2015/09/main" Requires="p159">
+      <p:transition xmlns:p14="http://schemas.microsoft.com/office/powerpoint/2010/main" spd="slow" p14:dur="2000">
+        <p159:morph option="byObject"/>
+      </p:transition>
+    </mc:Choice>
+    <mc:Fallback>
+      <p:transition spd="slow">
+        <p:fade/>
+      </p:transition>
+    </mc:Fallback>
+  </mc:AlternateContent>
   <p:txStyles>
     <p:titleStyle>
       <a:lvl1pPr algn="l" defTabSz="914400" rtl="0" eaLnBrk="1" latinLnBrk="0" hangingPunct="1">
@@ -3411,7 +3557,7 @@
         </p:blipFill>
         <p:spPr>
           <a:xfrm>
-            <a:off x="-147740" y="0"/>
+            <a:off x="-21905" y="-12321"/>
             <a:ext cx="12213905" cy="6870321"/>
           </a:xfrm>
           <a:prstGeom prst="rect">
@@ -3433,21 +3579,21 @@
         </p:nvSpPr>
         <p:spPr>
           <a:xfrm>
-            <a:off x="7572665" y="540140"/>
-            <a:ext cx="3669210" cy="369332"/>
+            <a:off x="4842843" y="1600200"/>
+            <a:ext cx="7234138" cy="646331"/>
           </a:xfrm>
           <a:prstGeom prst="rect">
             <a:avLst/>
           </a:prstGeom>
         </p:spPr>
         <p:txBody>
-          <a:bodyPr wrap="none">
+          <a:bodyPr wrap="square">
             <a:spAutoFit/>
           </a:bodyPr>
           <a:lstStyle/>
           <a:p>
             <a:r>
-              <a:rPr lang="hu-HU" dirty="0" err="1">
+              <a:rPr lang="hu-HU" sz="3600" dirty="0" err="1">
                 <a:solidFill>
                   <a:schemeClr val="bg1"/>
                 </a:solidFill>
@@ -3455,7 +3601,7 @@
               <a:t>Dwayne</a:t>
             </a:r>
             <a:r>
-              <a:rPr lang="hu-HU" dirty="0">
+              <a:rPr lang="hu-HU" sz="3600" dirty="0">
                 <a:solidFill>
                   <a:schemeClr val="bg1"/>
                 </a:solidFill>
@@ -3475,6 +3621,18 @@
   <p:clrMapOvr>
     <a:masterClrMapping/>
   </p:clrMapOvr>
+  <mc:AlternateContent xmlns:mc="http://schemas.openxmlformats.org/markup-compatibility/2006">
+    <mc:Choice xmlns:p159="http://schemas.microsoft.com/office/powerpoint/2015/09/main" Requires="p159">
+      <p:transition xmlns:p14="http://schemas.microsoft.com/office/powerpoint/2010/main" spd="slow" p14:dur="2000">
+        <p159:morph option="byObject"/>
+      </p:transition>
+    </mc:Choice>
+    <mc:Fallback>
+      <p:transition spd="slow">
+        <p:fade/>
+      </p:transition>
+    </mc:Fallback>
+  </mc:AlternateContent>
 </p:sld>
 </file>
 
@@ -3525,7 +3683,9 @@
           <a:p>
             <a:pPr algn="ctr"/>
             <a:r>
-              <a:rPr lang="hu-HU" sz="7200" dirty="0"/>
+              <a:rPr lang="hu-HU" sz="6600" b="1" dirty="0">
+                <a:latin typeface="+mn-lt"/>
+              </a:rPr>
               <a:t>Téma</a:t>
             </a:r>
           </a:p>
@@ -3570,7 +3730,7 @@
             </a:r>
             <a:r>
               <a:rPr lang="hu-HU" spc="300" dirty="0"/>
-              <a:t> Johnson életéről, családjáról és karrierjéről szól</a:t>
+              <a:t> Johnson életéről, családjáról és karrierjét mutatja be.</a:t>
             </a:r>
           </a:p>
         </p:txBody>
@@ -3585,6 +3745,291 @@
   <p:clrMapOvr>
     <a:masterClrMapping/>
   </p:clrMapOvr>
+  <mc:AlternateContent xmlns:mc="http://schemas.openxmlformats.org/markup-compatibility/2006">
+    <mc:Choice xmlns:p159="http://schemas.microsoft.com/office/powerpoint/2015/09/main" Requires="p159">
+      <p:transition xmlns:p14="http://schemas.microsoft.com/office/powerpoint/2010/main" spd="slow" p14:dur="2000">
+        <p159:morph option="byObject"/>
+      </p:transition>
+    </mc:Choice>
+    <mc:Fallback>
+      <p:transition spd="slow">
+        <p:fade/>
+      </p:transition>
+    </mc:Fallback>
+  </mc:AlternateContent>
+</p:sld>
+</file>
+
+<file path=ppt/slides/slide3.xml><?xml version="1.0" encoding="utf-8"?>
+<p:sld xmlns:a="http://schemas.openxmlformats.org/drawingml/2006/main" xmlns:r="http://schemas.openxmlformats.org/officeDocument/2006/relationships" xmlns:p="http://schemas.openxmlformats.org/presentationml/2006/main">
+  <p:cSld>
+    <p:spTree>
+      <p:nvGrpSpPr>
+        <p:cNvPr id="1" name=""/>
+        <p:cNvGrpSpPr/>
+        <p:nvPr/>
+      </p:nvGrpSpPr>
+      <p:grpSpPr>
+        <a:xfrm>
+          <a:off x="0" y="0"/>
+          <a:ext cx="0" cy="0"/>
+          <a:chOff x="0" y="0"/>
+          <a:chExt cx="0" cy="0"/>
+        </a:xfrm>
+      </p:grpSpPr>
+      <p:sp>
+        <p:nvSpPr>
+          <p:cNvPr id="2" name="Cím 1">
+            <a:extLst>
+              <a:ext uri="{FF2B5EF4-FFF2-40B4-BE49-F238E27FC236}">
+                <a16:creationId xmlns:a16="http://schemas.microsoft.com/office/drawing/2014/main" id="{03FB9908-82B0-D1F5-2745-00063762E5AD}"/>
+              </a:ext>
+            </a:extLst>
+          </p:cNvPr>
+          <p:cNvSpPr>
+            <a:spLocks noGrp="1"/>
+          </p:cNvSpPr>
+          <p:nvPr>
+            <p:ph type="title"/>
+          </p:nvPr>
+        </p:nvSpPr>
+        <p:spPr/>
+        <p:txBody>
+          <a:bodyPr>
+            <a:normAutofit/>
+          </a:bodyPr>
+          <a:lstStyle/>
+          <a:p>
+            <a:pPr algn="ctr"/>
+            <a:r>
+              <a:rPr lang="hu-HU" sz="5400" b="1" noProof="1">
+                <a:latin typeface="+mn-lt"/>
+              </a:rPr>
+              <a:t>		Készítők </a:t>
+            </a:r>
+            <a:r>
+              <a:rPr lang="hu-HU" sz="1300" noProof="1">
+                <a:latin typeface="+mn-lt"/>
+              </a:rPr>
+              <a:t>(készült a github adatai alapján)</a:t>
+            </a:r>
+          </a:p>
+        </p:txBody>
+      </p:sp>
+      <p:sp>
+        <p:nvSpPr>
+          <p:cNvPr id="3" name="Tartalom helye 2">
+            <a:extLst>
+              <a:ext uri="{FF2B5EF4-FFF2-40B4-BE49-F238E27FC236}">
+                <a16:creationId xmlns:a16="http://schemas.microsoft.com/office/drawing/2014/main" id="{605C9E5B-76CB-A94A-6A81-99154E78C3E3}"/>
+              </a:ext>
+            </a:extLst>
+          </p:cNvPr>
+          <p:cNvSpPr>
+            <a:spLocks noGrp="1"/>
+          </p:cNvSpPr>
+          <p:nvPr>
+            <p:ph idx="1"/>
+          </p:nvPr>
+        </p:nvSpPr>
+        <p:spPr/>
+        <p:txBody>
+          <a:bodyPr>
+            <a:normAutofit/>
+          </a:bodyPr>
+          <a:lstStyle/>
+          <a:p>
+            <a:pPr marL="0" indent="0" algn="ctr">
+              <a:lnSpc>
+                <a:spcPct val="250000"/>
+              </a:lnSpc>
+              <a:buNone/>
+            </a:pPr>
+            <a:r>
+              <a:rPr lang="hu-HU" sz="3600" noProof="1"/>
+              <a:t>Glázer Ármin Dominik - 42 commit</a:t>
+            </a:r>
+          </a:p>
+          <a:p>
+            <a:pPr marL="0" indent="0" algn="ctr">
+              <a:lnSpc>
+                <a:spcPct val="250000"/>
+              </a:lnSpc>
+              <a:buNone/>
+            </a:pPr>
+            <a:r>
+              <a:rPr lang="hu-HU" sz="3600" noProof="1"/>
+              <a:t>Boksay Levente - 70 commit</a:t>
+            </a:r>
+          </a:p>
+          <a:p>
+            <a:pPr marL="0" indent="0" algn="ctr">
+              <a:lnSpc>
+                <a:spcPct val="250000"/>
+              </a:lnSpc>
+              <a:buNone/>
+            </a:pPr>
+            <a:r>
+              <a:rPr lang="hu-HU" sz="3600" noProof="1"/>
+              <a:t>Győr Norbert - 17 commit</a:t>
+            </a:r>
+          </a:p>
+        </p:txBody>
+      </p:sp>
+    </p:spTree>
+    <p:extLst>
+      <p:ext uri="{BB962C8B-B14F-4D97-AF65-F5344CB8AC3E}">
+        <p14:creationId xmlns:p14="http://schemas.microsoft.com/office/powerpoint/2010/main" val="2026754947"/>
+      </p:ext>
+    </p:extLst>
+  </p:cSld>
+  <p:clrMapOvr>
+    <a:masterClrMapping/>
+  </p:clrMapOvr>
+  <mc:AlternateContent xmlns:mc="http://schemas.openxmlformats.org/markup-compatibility/2006">
+    <mc:Choice xmlns:p159="http://schemas.microsoft.com/office/powerpoint/2015/09/main" Requires="p159">
+      <p:transition xmlns:p14="http://schemas.microsoft.com/office/powerpoint/2010/main" spd="slow" p14:dur="2000">
+        <p159:morph option="byObject"/>
+      </p:transition>
+    </mc:Choice>
+    <mc:Fallback>
+      <p:transition spd="slow">
+        <p:fade/>
+      </p:transition>
+    </mc:Fallback>
+  </mc:AlternateContent>
+</p:sld>
+</file>
+
+<file path=ppt/slides/slide4.xml><?xml version="1.0" encoding="utf-8"?>
+<p:sld xmlns:a="http://schemas.openxmlformats.org/drawingml/2006/main" xmlns:r="http://schemas.openxmlformats.org/officeDocument/2006/relationships" xmlns:p="http://schemas.openxmlformats.org/presentationml/2006/main">
+  <p:cSld>
+    <p:spTree>
+      <p:nvGrpSpPr>
+        <p:cNvPr id="1" name=""/>
+        <p:cNvGrpSpPr/>
+        <p:nvPr/>
+      </p:nvGrpSpPr>
+      <p:grpSpPr>
+        <a:xfrm>
+          <a:off x="0" y="0"/>
+          <a:ext cx="0" cy="0"/>
+          <a:chOff x="0" y="0"/>
+          <a:chExt cx="0" cy="0"/>
+        </a:xfrm>
+      </p:grpSpPr>
+      <p:sp>
+        <p:nvSpPr>
+          <p:cNvPr id="2" name="Cím 1">
+            <a:extLst>
+              <a:ext uri="{FF2B5EF4-FFF2-40B4-BE49-F238E27FC236}">
+                <a16:creationId xmlns:a16="http://schemas.microsoft.com/office/drawing/2014/main" id="{E87B8954-D85D-E39A-EF26-4D60F5B6F605}"/>
+              </a:ext>
+            </a:extLst>
+          </p:cNvPr>
+          <p:cNvSpPr>
+            <a:spLocks noGrp="1"/>
+          </p:cNvSpPr>
+          <p:nvPr>
+            <p:ph type="title"/>
+          </p:nvPr>
+        </p:nvSpPr>
+        <p:spPr/>
+        <p:txBody>
+          <a:bodyPr>
+            <a:normAutofit/>
+          </a:bodyPr>
+          <a:lstStyle/>
+          <a:p>
+            <a:pPr algn="ctr"/>
+            <a:r>
+              <a:rPr lang="hu-HU" sz="6000" b="1" dirty="0">
+                <a:latin typeface="+mn-lt"/>
+              </a:rPr>
+              <a:t>Használt nyelvek</a:t>
+            </a:r>
+          </a:p>
+        </p:txBody>
+      </p:sp>
+      <p:sp>
+        <p:nvSpPr>
+          <p:cNvPr id="3" name="Tartalom helye 2">
+            <a:extLst>
+              <a:ext uri="{FF2B5EF4-FFF2-40B4-BE49-F238E27FC236}">
+                <a16:creationId xmlns:a16="http://schemas.microsoft.com/office/drawing/2014/main" id="{151F0F97-A2C9-5822-1DD2-64F4C31910F8}"/>
+              </a:ext>
+            </a:extLst>
+          </p:cNvPr>
+          <p:cNvSpPr>
+            <a:spLocks noGrp="1"/>
+          </p:cNvSpPr>
+          <p:nvPr>
+            <p:ph idx="1"/>
+          </p:nvPr>
+        </p:nvSpPr>
+        <p:spPr/>
+        <p:txBody>
+          <a:bodyPr>
+            <a:normAutofit/>
+          </a:bodyPr>
+          <a:lstStyle/>
+          <a:p>
+            <a:pPr>
+              <a:lnSpc>
+                <a:spcPct val="250000"/>
+              </a:lnSpc>
+            </a:pPr>
+            <a:r>
+              <a:rPr lang="hu-HU" sz="3200" dirty="0"/>
+              <a:t>HTML 71.4%</a:t>
+            </a:r>
+          </a:p>
+          <a:p>
+            <a:pPr>
+              <a:lnSpc>
+                <a:spcPct val="250000"/>
+              </a:lnSpc>
+            </a:pPr>
+            <a:r>
+              <a:rPr lang="hu-HU" sz="3200" dirty="0"/>
+              <a:t>CSS 15.5%</a:t>
+            </a:r>
+          </a:p>
+          <a:p>
+            <a:pPr>
+              <a:lnSpc>
+                <a:spcPct val="250000"/>
+              </a:lnSpc>
+            </a:pPr>
+            <a:r>
+              <a:rPr lang="hu-HU" sz="3200" dirty="0"/>
+              <a:t>JavaScript 13.1%</a:t>
+            </a:r>
+          </a:p>
+        </p:txBody>
+      </p:sp>
+    </p:spTree>
+    <p:extLst>
+      <p:ext uri="{BB962C8B-B14F-4D97-AF65-F5344CB8AC3E}">
+        <p14:creationId xmlns:p14="http://schemas.microsoft.com/office/powerpoint/2010/main" val="704455751"/>
+      </p:ext>
+    </p:extLst>
+  </p:cSld>
+  <p:clrMapOvr>
+    <a:masterClrMapping/>
+  </p:clrMapOvr>
+  <mc:AlternateContent xmlns:mc="http://schemas.openxmlformats.org/markup-compatibility/2006">
+    <mc:Choice xmlns:p159="http://schemas.microsoft.com/office/powerpoint/2015/09/main" Requires="p159">
+      <p:transition xmlns:p14="http://schemas.microsoft.com/office/powerpoint/2010/main" spd="slow" p14:dur="2000">
+        <p159:morph option="byObject"/>
+      </p:transition>
+    </mc:Choice>
+    <mc:Fallback>
+      <p:transition spd="slow">
+        <p:fade/>
+      </p:transition>
+    </mc:Fallback>
+  </mc:AlternateContent>
 </p:sld>
 </file>
 

--- a/Dwayne Johnson.pptx
+++ b/Dwayne Johnson.pptx
@@ -4,11 +4,16 @@
   <p:sldMasterIdLst>
     <p:sldMasterId id="2147483648" r:id="rId1"/>
   </p:sldMasterIdLst>
+  <p:notesMasterIdLst>
+    <p:notesMasterId r:id="rId8"/>
+  </p:notesMasterIdLst>
   <p:sldIdLst>
     <p:sldId id="256" r:id="rId2"/>
-    <p:sldId id="257" r:id="rId3"/>
-    <p:sldId id="258" r:id="rId4"/>
-    <p:sldId id="259" r:id="rId5"/>
+    <p:sldId id="260" r:id="rId3"/>
+    <p:sldId id="261" r:id="rId4"/>
+    <p:sldId id="262" r:id="rId5"/>
+    <p:sldId id="264" r:id="rId6"/>
+    <p:sldId id="263" r:id="rId7"/>
   </p:sldIdLst>
   <p:sldSz cx="12192000" cy="6858000"/>
   <p:notesSz cx="6858000" cy="9144000"/>
@@ -115,6 +120,355 @@
 </p:presentation>
 </file>
 
+<file path=ppt/notesMasters/notesMaster1.xml><?xml version="1.0" encoding="utf-8"?>
+<p:notesMaster xmlns:a="http://schemas.openxmlformats.org/drawingml/2006/main" xmlns:r="http://schemas.openxmlformats.org/officeDocument/2006/relationships" xmlns:p="http://schemas.openxmlformats.org/presentationml/2006/main">
+  <p:cSld>
+    <p:bg>
+      <p:bgRef idx="1001">
+        <a:schemeClr val="bg1"/>
+      </p:bgRef>
+    </p:bg>
+    <p:spTree>
+      <p:nvGrpSpPr>
+        <p:cNvPr id="1" name=""/>
+        <p:cNvGrpSpPr/>
+        <p:nvPr/>
+      </p:nvGrpSpPr>
+      <p:grpSpPr>
+        <a:xfrm>
+          <a:off x="0" y="0"/>
+          <a:ext cx="0" cy="0"/>
+          <a:chOff x="0" y="0"/>
+          <a:chExt cx="0" cy="0"/>
+        </a:xfrm>
+      </p:grpSpPr>
+      <p:sp>
+        <p:nvSpPr>
+          <p:cNvPr id="2" name="Élőfej helye 1"/>
+          <p:cNvSpPr>
+            <a:spLocks noGrp="1"/>
+          </p:cNvSpPr>
+          <p:nvPr>
+            <p:ph type="hdr" sz="quarter"/>
+          </p:nvPr>
+        </p:nvSpPr>
+        <p:spPr>
+          <a:xfrm>
+            <a:off x="0" y="0"/>
+            <a:ext cx="2971800" cy="458788"/>
+          </a:xfrm>
+          <a:prstGeom prst="rect">
+            <a:avLst/>
+          </a:prstGeom>
+        </p:spPr>
+        <p:txBody>
+          <a:bodyPr vert="horz" lIns="91440" tIns="45720" rIns="91440" bIns="45720" rtlCol="0"/>
+          <a:lstStyle>
+            <a:lvl1pPr algn="l">
+              <a:defRPr sz="1200"/>
+            </a:lvl1pPr>
+          </a:lstStyle>
+          <a:p>
+            <a:endParaRPr lang="hu-HU"/>
+          </a:p>
+        </p:txBody>
+      </p:sp>
+      <p:sp>
+        <p:nvSpPr>
+          <p:cNvPr id="3" name="Dátum helye 2"/>
+          <p:cNvSpPr>
+            <a:spLocks noGrp="1"/>
+          </p:cNvSpPr>
+          <p:nvPr>
+            <p:ph type="dt" idx="1"/>
+          </p:nvPr>
+        </p:nvSpPr>
+        <p:spPr>
+          <a:xfrm>
+            <a:off x="3884613" y="0"/>
+            <a:ext cx="2971800" cy="458788"/>
+          </a:xfrm>
+          <a:prstGeom prst="rect">
+            <a:avLst/>
+          </a:prstGeom>
+        </p:spPr>
+        <p:txBody>
+          <a:bodyPr vert="horz" lIns="91440" tIns="45720" rIns="91440" bIns="45720" rtlCol="0"/>
+          <a:lstStyle>
+            <a:lvl1pPr algn="r">
+              <a:defRPr sz="1200"/>
+            </a:lvl1pPr>
+          </a:lstStyle>
+          <a:p>
+            <a:fld id="{24EAA58A-53C5-4BF1-8D06-9E1B638EAAB5}" type="datetimeFigureOut">
+              <a:rPr lang="hu-HU" smtClean="0"/>
+              <a:t>2025. 02. 17.</a:t>
+            </a:fld>
+            <a:endParaRPr lang="hu-HU"/>
+          </a:p>
+        </p:txBody>
+      </p:sp>
+      <p:sp>
+        <p:nvSpPr>
+          <p:cNvPr id="4" name="Diakép helye 3"/>
+          <p:cNvSpPr>
+            <a:spLocks noGrp="1" noRot="1" noChangeAspect="1"/>
+          </p:cNvSpPr>
+          <p:nvPr>
+            <p:ph type="sldImg" idx="2"/>
+          </p:nvPr>
+        </p:nvSpPr>
+        <p:spPr>
+          <a:xfrm>
+            <a:off x="685800" y="1143000"/>
+            <a:ext cx="5486400" cy="3086100"/>
+          </a:xfrm>
+          <a:prstGeom prst="rect">
+            <a:avLst/>
+          </a:prstGeom>
+          <a:noFill/>
+          <a:ln w="12700">
+            <a:solidFill>
+              <a:prstClr val="black"/>
+            </a:solidFill>
+          </a:ln>
+        </p:spPr>
+        <p:txBody>
+          <a:bodyPr vert="horz" lIns="91440" tIns="45720" rIns="91440" bIns="45720" rtlCol="0" anchor="ctr"/>
+          <a:lstStyle/>
+          <a:p>
+            <a:endParaRPr lang="hu-HU"/>
+          </a:p>
+        </p:txBody>
+      </p:sp>
+      <p:sp>
+        <p:nvSpPr>
+          <p:cNvPr id="5" name="Jegyzetek helye 4"/>
+          <p:cNvSpPr>
+            <a:spLocks noGrp="1"/>
+          </p:cNvSpPr>
+          <p:nvPr>
+            <p:ph type="body" sz="quarter" idx="3"/>
+          </p:nvPr>
+        </p:nvSpPr>
+        <p:spPr>
+          <a:xfrm>
+            <a:off x="685800" y="4400550"/>
+            <a:ext cx="5486400" cy="3600450"/>
+          </a:xfrm>
+          <a:prstGeom prst="rect">
+            <a:avLst/>
+          </a:prstGeom>
+        </p:spPr>
+        <p:txBody>
+          <a:bodyPr vert="horz" lIns="91440" tIns="45720" rIns="91440" bIns="45720" rtlCol="0"/>
+          <a:lstStyle/>
+          <a:p>
+            <a:pPr lvl="0"/>
+            <a:r>
+              <a:rPr lang="hu-HU"/>
+              <a:t>Mintaszöveg szerkesztése</a:t>
+            </a:r>
+          </a:p>
+          <a:p>
+            <a:pPr lvl="1"/>
+            <a:r>
+              <a:rPr lang="hu-HU"/>
+              <a:t>Második szint</a:t>
+            </a:r>
+          </a:p>
+          <a:p>
+            <a:pPr lvl="2"/>
+            <a:r>
+              <a:rPr lang="hu-HU"/>
+              <a:t>Harmadik szint</a:t>
+            </a:r>
+          </a:p>
+          <a:p>
+            <a:pPr lvl="3"/>
+            <a:r>
+              <a:rPr lang="hu-HU"/>
+              <a:t>Negyedik szint</a:t>
+            </a:r>
+          </a:p>
+          <a:p>
+            <a:pPr lvl="4"/>
+            <a:r>
+              <a:rPr lang="hu-HU"/>
+              <a:t>Ötödik szint</a:t>
+            </a:r>
+          </a:p>
+        </p:txBody>
+      </p:sp>
+      <p:sp>
+        <p:nvSpPr>
+          <p:cNvPr id="6" name="Élőláb helye 5"/>
+          <p:cNvSpPr>
+            <a:spLocks noGrp="1"/>
+          </p:cNvSpPr>
+          <p:nvPr>
+            <p:ph type="ftr" sz="quarter" idx="4"/>
+          </p:nvPr>
+        </p:nvSpPr>
+        <p:spPr>
+          <a:xfrm>
+            <a:off x="0" y="8685213"/>
+            <a:ext cx="2971800" cy="458787"/>
+          </a:xfrm>
+          <a:prstGeom prst="rect">
+            <a:avLst/>
+          </a:prstGeom>
+        </p:spPr>
+        <p:txBody>
+          <a:bodyPr vert="horz" lIns="91440" tIns="45720" rIns="91440" bIns="45720" rtlCol="0" anchor="b"/>
+          <a:lstStyle>
+            <a:lvl1pPr algn="l">
+              <a:defRPr sz="1200"/>
+            </a:lvl1pPr>
+          </a:lstStyle>
+          <a:p>
+            <a:endParaRPr lang="hu-HU"/>
+          </a:p>
+        </p:txBody>
+      </p:sp>
+      <p:sp>
+        <p:nvSpPr>
+          <p:cNvPr id="7" name="Dia számának helye 6"/>
+          <p:cNvSpPr>
+            <a:spLocks noGrp="1"/>
+          </p:cNvSpPr>
+          <p:nvPr>
+            <p:ph type="sldNum" sz="quarter" idx="5"/>
+          </p:nvPr>
+        </p:nvSpPr>
+        <p:spPr>
+          <a:xfrm>
+            <a:off x="3884613" y="8685213"/>
+            <a:ext cx="2971800" cy="458787"/>
+          </a:xfrm>
+          <a:prstGeom prst="rect">
+            <a:avLst/>
+          </a:prstGeom>
+        </p:spPr>
+        <p:txBody>
+          <a:bodyPr vert="horz" lIns="91440" tIns="45720" rIns="91440" bIns="45720" rtlCol="0" anchor="b"/>
+          <a:lstStyle>
+            <a:lvl1pPr algn="r">
+              <a:defRPr sz="1200"/>
+            </a:lvl1pPr>
+          </a:lstStyle>
+          <a:p>
+            <a:fld id="{068C2BEA-70B7-499C-82A0-27FD2CCCCABF}" type="slidenum">
+              <a:rPr lang="hu-HU" smtClean="0"/>
+              <a:t>‹#›</a:t>
+            </a:fld>
+            <a:endParaRPr lang="hu-HU"/>
+          </a:p>
+        </p:txBody>
+      </p:sp>
+    </p:spTree>
+    <p:extLst>
+      <p:ext uri="{BB962C8B-B14F-4D97-AF65-F5344CB8AC3E}">
+        <p14:creationId xmlns:p14="http://schemas.microsoft.com/office/powerpoint/2010/main" val="2839842634"/>
+      </p:ext>
+    </p:extLst>
+  </p:cSld>
+  <p:clrMap bg1="lt1" tx1="dk1" bg2="lt2" tx2="dk2" accent1="accent1" accent2="accent2" accent3="accent3" accent4="accent4" accent5="accent5" accent6="accent6" hlink="hlink" folHlink="folHlink"/>
+  <p:notesStyle>
+    <a:lvl1pPr marL="0" algn="l" defTabSz="914400" rtl="0" eaLnBrk="1" latinLnBrk="0" hangingPunct="1">
+      <a:defRPr sz="1200" kern="1200">
+        <a:solidFill>
+          <a:schemeClr val="tx1"/>
+        </a:solidFill>
+        <a:latin typeface="+mn-lt"/>
+        <a:ea typeface="+mn-ea"/>
+        <a:cs typeface="+mn-cs"/>
+      </a:defRPr>
+    </a:lvl1pPr>
+    <a:lvl2pPr marL="457200" algn="l" defTabSz="914400" rtl="0" eaLnBrk="1" latinLnBrk="0" hangingPunct="1">
+      <a:defRPr sz="1200" kern="1200">
+        <a:solidFill>
+          <a:schemeClr val="tx1"/>
+        </a:solidFill>
+        <a:latin typeface="+mn-lt"/>
+        <a:ea typeface="+mn-ea"/>
+        <a:cs typeface="+mn-cs"/>
+      </a:defRPr>
+    </a:lvl2pPr>
+    <a:lvl3pPr marL="914400" algn="l" defTabSz="914400" rtl="0" eaLnBrk="1" latinLnBrk="0" hangingPunct="1">
+      <a:defRPr sz="1200" kern="1200">
+        <a:solidFill>
+          <a:schemeClr val="tx1"/>
+        </a:solidFill>
+        <a:latin typeface="+mn-lt"/>
+        <a:ea typeface="+mn-ea"/>
+        <a:cs typeface="+mn-cs"/>
+      </a:defRPr>
+    </a:lvl3pPr>
+    <a:lvl4pPr marL="1371600" algn="l" defTabSz="914400" rtl="0" eaLnBrk="1" latinLnBrk="0" hangingPunct="1">
+      <a:defRPr sz="1200" kern="1200">
+        <a:solidFill>
+          <a:schemeClr val="tx1"/>
+        </a:solidFill>
+        <a:latin typeface="+mn-lt"/>
+        <a:ea typeface="+mn-ea"/>
+        <a:cs typeface="+mn-cs"/>
+      </a:defRPr>
+    </a:lvl4pPr>
+    <a:lvl5pPr marL="1828800" algn="l" defTabSz="914400" rtl="0" eaLnBrk="1" latinLnBrk="0" hangingPunct="1">
+      <a:defRPr sz="1200" kern="1200">
+        <a:solidFill>
+          <a:schemeClr val="tx1"/>
+        </a:solidFill>
+        <a:latin typeface="+mn-lt"/>
+        <a:ea typeface="+mn-ea"/>
+        <a:cs typeface="+mn-cs"/>
+      </a:defRPr>
+    </a:lvl5pPr>
+    <a:lvl6pPr marL="2286000" algn="l" defTabSz="914400" rtl="0" eaLnBrk="1" latinLnBrk="0" hangingPunct="1">
+      <a:defRPr sz="1200" kern="1200">
+        <a:solidFill>
+          <a:schemeClr val="tx1"/>
+        </a:solidFill>
+        <a:latin typeface="+mn-lt"/>
+        <a:ea typeface="+mn-ea"/>
+        <a:cs typeface="+mn-cs"/>
+      </a:defRPr>
+    </a:lvl6pPr>
+    <a:lvl7pPr marL="2743200" algn="l" defTabSz="914400" rtl="0" eaLnBrk="1" latinLnBrk="0" hangingPunct="1">
+      <a:defRPr sz="1200" kern="1200">
+        <a:solidFill>
+          <a:schemeClr val="tx1"/>
+        </a:solidFill>
+        <a:latin typeface="+mn-lt"/>
+        <a:ea typeface="+mn-ea"/>
+        <a:cs typeface="+mn-cs"/>
+      </a:defRPr>
+    </a:lvl7pPr>
+    <a:lvl8pPr marL="3200400" algn="l" defTabSz="914400" rtl="0" eaLnBrk="1" latinLnBrk="0" hangingPunct="1">
+      <a:defRPr sz="1200" kern="1200">
+        <a:solidFill>
+          <a:schemeClr val="tx1"/>
+        </a:solidFill>
+        <a:latin typeface="+mn-lt"/>
+        <a:ea typeface="+mn-ea"/>
+        <a:cs typeface="+mn-cs"/>
+      </a:defRPr>
+    </a:lvl8pPr>
+    <a:lvl9pPr marL="3657600" algn="l" defTabSz="914400" rtl="0" eaLnBrk="1" latinLnBrk="0" hangingPunct="1">
+      <a:defRPr sz="1200" kern="1200">
+        <a:solidFill>
+          <a:schemeClr val="tx1"/>
+        </a:solidFill>
+        <a:latin typeface="+mn-lt"/>
+        <a:ea typeface="+mn-ea"/>
+        <a:cs typeface="+mn-cs"/>
+      </a:defRPr>
+    </a:lvl9pPr>
+  </p:notesStyle>
+</p:notesMaster>
+</file>
+
 <file path=ppt/slideLayouts/slideLayout1.xml><?xml version="1.0" encoding="utf-8"?>
 <p:sldLayout xmlns:a="http://schemas.openxmlformats.org/drawingml/2006/main" xmlns:r="http://schemas.openxmlformats.org/officeDocument/2006/relationships" xmlns:p="http://schemas.openxmlformats.org/presentationml/2006/main" type="title" preserve="1">
   <p:cSld name="Címdia">
@@ -262,7 +616,7 @@
           <a:p>
             <a:fld id="{27C52E7B-312F-4F68-B050-DB38E8C31169}" type="datetimeFigureOut">
               <a:rPr lang="hu-HU" smtClean="0"/>
-              <a:t>2025. 02. 15.</a:t>
+              <a:t>2025. 02. 17.</a:t>
             </a:fld>
             <a:endParaRPr lang="hu-HU"/>
           </a:p>
@@ -332,13 +686,13 @@
   <p:clrMapOvr>
     <a:masterClrMapping/>
   </p:clrMapOvr>
-  <mc:AlternateContent xmlns:mc="http://schemas.openxmlformats.org/markup-compatibility/2006">
-    <mc:Choice xmlns:p159="http://schemas.microsoft.com/office/powerpoint/2015/09/main" Requires="p159">
+  <mc:AlternateContent xmlns:mc="http://schemas.openxmlformats.org/markup-compatibility/2006" xmlns:p159="http://schemas.microsoft.com/office/powerpoint/2015/09/main">
+    <mc:Choice Requires="p159">
       <p:transition xmlns:p14="http://schemas.microsoft.com/office/powerpoint/2010/main" spd="slow" p14:dur="2000">
         <p159:morph option="byObject"/>
       </p:transition>
     </mc:Choice>
-    <mc:Fallback>
+    <mc:Fallback xmlns="">
       <p:transition spd="slow">
         <p:fade/>
       </p:transition>
@@ -472,7 +826,7 @@
           <a:p>
             <a:fld id="{27C52E7B-312F-4F68-B050-DB38E8C31169}" type="datetimeFigureOut">
               <a:rPr lang="hu-HU" smtClean="0"/>
-              <a:t>2025. 02. 15.</a:t>
+              <a:t>2025. 02. 17.</a:t>
             </a:fld>
             <a:endParaRPr lang="hu-HU"/>
           </a:p>
@@ -542,13 +896,13 @@
   <p:clrMapOvr>
     <a:masterClrMapping/>
   </p:clrMapOvr>
-  <mc:AlternateContent xmlns:mc="http://schemas.openxmlformats.org/markup-compatibility/2006">
-    <mc:Choice xmlns:p159="http://schemas.microsoft.com/office/powerpoint/2015/09/main" Requires="p159">
+  <mc:AlternateContent xmlns:mc="http://schemas.openxmlformats.org/markup-compatibility/2006" xmlns:p159="http://schemas.microsoft.com/office/powerpoint/2015/09/main">
+    <mc:Choice Requires="p159">
       <p:transition xmlns:p14="http://schemas.microsoft.com/office/powerpoint/2010/main" spd="slow" p14:dur="2000">
         <p159:morph option="byObject"/>
       </p:transition>
     </mc:Choice>
-    <mc:Fallback>
+    <mc:Fallback xmlns="">
       <p:transition spd="slow">
         <p:fade/>
       </p:transition>
@@ -692,7 +1046,7 @@
           <a:p>
             <a:fld id="{27C52E7B-312F-4F68-B050-DB38E8C31169}" type="datetimeFigureOut">
               <a:rPr lang="hu-HU" smtClean="0"/>
-              <a:t>2025. 02. 15.</a:t>
+              <a:t>2025. 02. 17.</a:t>
             </a:fld>
             <a:endParaRPr lang="hu-HU"/>
           </a:p>
@@ -762,13 +1116,13 @@
   <p:clrMapOvr>
     <a:masterClrMapping/>
   </p:clrMapOvr>
-  <mc:AlternateContent xmlns:mc="http://schemas.openxmlformats.org/markup-compatibility/2006">
-    <mc:Choice xmlns:p159="http://schemas.microsoft.com/office/powerpoint/2015/09/main" Requires="p159">
+  <mc:AlternateContent xmlns:mc="http://schemas.openxmlformats.org/markup-compatibility/2006" xmlns:p159="http://schemas.microsoft.com/office/powerpoint/2015/09/main">
+    <mc:Choice Requires="p159">
       <p:transition xmlns:p14="http://schemas.microsoft.com/office/powerpoint/2010/main" spd="slow" p14:dur="2000">
         <p159:morph option="byObject"/>
       </p:transition>
     </mc:Choice>
-    <mc:Fallback>
+    <mc:Fallback xmlns="">
       <p:transition spd="slow">
         <p:fade/>
       </p:transition>
@@ -902,7 +1256,7 @@
           <a:p>
             <a:fld id="{27C52E7B-312F-4F68-B050-DB38E8C31169}" type="datetimeFigureOut">
               <a:rPr lang="hu-HU" smtClean="0"/>
-              <a:t>2025. 02. 15.</a:t>
+              <a:t>2025. 02. 17.</a:t>
             </a:fld>
             <a:endParaRPr lang="hu-HU"/>
           </a:p>
@@ -972,13 +1326,13 @@
   <p:clrMapOvr>
     <a:masterClrMapping/>
   </p:clrMapOvr>
-  <mc:AlternateContent xmlns:mc="http://schemas.openxmlformats.org/markup-compatibility/2006">
-    <mc:Choice xmlns:p159="http://schemas.microsoft.com/office/powerpoint/2015/09/main" Requires="p159">
+  <mc:AlternateContent xmlns:mc="http://schemas.openxmlformats.org/markup-compatibility/2006" xmlns:p159="http://schemas.microsoft.com/office/powerpoint/2015/09/main">
+    <mc:Choice Requires="p159">
       <p:transition xmlns:p14="http://schemas.microsoft.com/office/powerpoint/2010/main" spd="slow" p14:dur="2000">
         <p159:morph option="byObject"/>
       </p:transition>
     </mc:Choice>
-    <mc:Fallback>
+    <mc:Fallback xmlns="">
       <p:transition spd="slow">
         <p:fade/>
       </p:transition>
@@ -1189,7 +1543,7 @@
           <a:p>
             <a:fld id="{27C52E7B-312F-4F68-B050-DB38E8C31169}" type="datetimeFigureOut">
               <a:rPr lang="hu-HU" smtClean="0"/>
-              <a:t>2025. 02. 15.</a:t>
+              <a:t>2025. 02. 17.</a:t>
             </a:fld>
             <a:endParaRPr lang="hu-HU"/>
           </a:p>
@@ -1259,13 +1613,13 @@
   <p:clrMapOvr>
     <a:masterClrMapping/>
   </p:clrMapOvr>
-  <mc:AlternateContent xmlns:mc="http://schemas.openxmlformats.org/markup-compatibility/2006">
-    <mc:Choice xmlns:p159="http://schemas.microsoft.com/office/powerpoint/2015/09/main" Requires="p159">
+  <mc:AlternateContent xmlns:mc="http://schemas.openxmlformats.org/markup-compatibility/2006" xmlns:p159="http://schemas.microsoft.com/office/powerpoint/2015/09/main">
+    <mc:Choice Requires="p159">
       <p:transition xmlns:p14="http://schemas.microsoft.com/office/powerpoint/2010/main" spd="slow" p14:dur="2000">
         <p159:morph option="byObject"/>
       </p:transition>
     </mc:Choice>
-    <mc:Fallback>
+    <mc:Fallback xmlns="">
       <p:transition spd="slow">
         <p:fade/>
       </p:transition>
@@ -1466,7 +1820,7 @@
           <a:p>
             <a:fld id="{27C52E7B-312F-4F68-B050-DB38E8C31169}" type="datetimeFigureOut">
               <a:rPr lang="hu-HU" smtClean="0"/>
-              <a:t>2025. 02. 15.</a:t>
+              <a:t>2025. 02. 17.</a:t>
             </a:fld>
             <a:endParaRPr lang="hu-HU"/>
           </a:p>
@@ -1536,13 +1890,13 @@
   <p:clrMapOvr>
     <a:masterClrMapping/>
   </p:clrMapOvr>
-  <mc:AlternateContent xmlns:mc="http://schemas.openxmlformats.org/markup-compatibility/2006">
-    <mc:Choice xmlns:p159="http://schemas.microsoft.com/office/powerpoint/2015/09/main" Requires="p159">
+  <mc:AlternateContent xmlns:mc="http://schemas.openxmlformats.org/markup-compatibility/2006" xmlns:p159="http://schemas.microsoft.com/office/powerpoint/2015/09/main">
+    <mc:Choice Requires="p159">
       <p:transition xmlns:p14="http://schemas.microsoft.com/office/powerpoint/2010/main" spd="slow" p14:dur="2000">
         <p159:morph option="byObject"/>
       </p:transition>
     </mc:Choice>
-    <mc:Fallback>
+    <mc:Fallback xmlns="">
       <p:transition spd="slow">
         <p:fade/>
       </p:transition>
@@ -1890,7 +2244,7 @@
           <a:p>
             <a:fld id="{27C52E7B-312F-4F68-B050-DB38E8C31169}" type="datetimeFigureOut">
               <a:rPr lang="hu-HU" smtClean="0"/>
-              <a:t>2025. 02. 15.</a:t>
+              <a:t>2025. 02. 17.</a:t>
             </a:fld>
             <a:endParaRPr lang="hu-HU"/>
           </a:p>
@@ -1960,13 +2314,13 @@
   <p:clrMapOvr>
     <a:masterClrMapping/>
   </p:clrMapOvr>
-  <mc:AlternateContent xmlns:mc="http://schemas.openxmlformats.org/markup-compatibility/2006">
-    <mc:Choice xmlns:p159="http://schemas.microsoft.com/office/powerpoint/2015/09/main" Requires="p159">
+  <mc:AlternateContent xmlns:mc="http://schemas.openxmlformats.org/markup-compatibility/2006" xmlns:p159="http://schemas.microsoft.com/office/powerpoint/2015/09/main">
+    <mc:Choice Requires="p159">
       <p:transition xmlns:p14="http://schemas.microsoft.com/office/powerpoint/2010/main" spd="slow" p14:dur="2000">
         <p159:morph option="byObject"/>
       </p:transition>
     </mc:Choice>
-    <mc:Fallback>
+    <mc:Fallback xmlns="">
       <p:transition spd="slow">
         <p:fade/>
       </p:transition>
@@ -2043,7 +2397,7 @@
           <a:p>
             <a:fld id="{27C52E7B-312F-4F68-B050-DB38E8C31169}" type="datetimeFigureOut">
               <a:rPr lang="hu-HU" smtClean="0"/>
-              <a:t>2025. 02. 15.</a:t>
+              <a:t>2025. 02. 17.</a:t>
             </a:fld>
             <a:endParaRPr lang="hu-HU"/>
           </a:p>
@@ -2113,13 +2467,13 @@
   <p:clrMapOvr>
     <a:masterClrMapping/>
   </p:clrMapOvr>
-  <mc:AlternateContent xmlns:mc="http://schemas.openxmlformats.org/markup-compatibility/2006">
-    <mc:Choice xmlns:p159="http://schemas.microsoft.com/office/powerpoint/2015/09/main" Requires="p159">
+  <mc:AlternateContent xmlns:mc="http://schemas.openxmlformats.org/markup-compatibility/2006" xmlns:p159="http://schemas.microsoft.com/office/powerpoint/2015/09/main">
+    <mc:Choice Requires="p159">
       <p:transition xmlns:p14="http://schemas.microsoft.com/office/powerpoint/2010/main" spd="slow" p14:dur="2000">
         <p159:morph option="byObject"/>
       </p:transition>
     </mc:Choice>
-    <mc:Fallback>
+    <mc:Fallback xmlns="">
       <p:transition spd="slow">
         <p:fade/>
       </p:transition>
@@ -2168,7 +2522,7 @@
           <a:p>
             <a:fld id="{27C52E7B-312F-4F68-B050-DB38E8C31169}" type="datetimeFigureOut">
               <a:rPr lang="hu-HU" smtClean="0"/>
-              <a:t>2025. 02. 15.</a:t>
+              <a:t>2025. 02. 17.</a:t>
             </a:fld>
             <a:endParaRPr lang="hu-HU"/>
           </a:p>
@@ -2238,13 +2592,13 @@
   <p:clrMapOvr>
     <a:masterClrMapping/>
   </p:clrMapOvr>
-  <mc:AlternateContent xmlns:mc="http://schemas.openxmlformats.org/markup-compatibility/2006">
-    <mc:Choice xmlns:p159="http://schemas.microsoft.com/office/powerpoint/2015/09/main" Requires="p159">
+  <mc:AlternateContent xmlns:mc="http://schemas.openxmlformats.org/markup-compatibility/2006" xmlns:p159="http://schemas.microsoft.com/office/powerpoint/2015/09/main">
+    <mc:Choice Requires="p159">
       <p:transition xmlns:p14="http://schemas.microsoft.com/office/powerpoint/2010/main" spd="slow" p14:dur="2000">
         <p159:morph option="byObject"/>
       </p:transition>
     </mc:Choice>
-    <mc:Fallback>
+    <mc:Fallback xmlns="">
       <p:transition spd="slow">
         <p:fade/>
       </p:transition>
@@ -2491,7 +2845,7 @@
           <a:p>
             <a:fld id="{27C52E7B-312F-4F68-B050-DB38E8C31169}" type="datetimeFigureOut">
               <a:rPr lang="hu-HU" smtClean="0"/>
-              <a:t>2025. 02. 15.</a:t>
+              <a:t>2025. 02. 17.</a:t>
             </a:fld>
             <a:endParaRPr lang="hu-HU"/>
           </a:p>
@@ -2561,13 +2915,13 @@
   <p:clrMapOvr>
     <a:masterClrMapping/>
   </p:clrMapOvr>
-  <mc:AlternateContent xmlns:mc="http://schemas.openxmlformats.org/markup-compatibility/2006">
-    <mc:Choice xmlns:p159="http://schemas.microsoft.com/office/powerpoint/2015/09/main" Requires="p159">
+  <mc:AlternateContent xmlns:mc="http://schemas.openxmlformats.org/markup-compatibility/2006" xmlns:p159="http://schemas.microsoft.com/office/powerpoint/2015/09/main">
+    <mc:Choice Requires="p159">
       <p:transition xmlns:p14="http://schemas.microsoft.com/office/powerpoint/2010/main" spd="slow" p14:dur="2000">
         <p159:morph option="byObject"/>
       </p:transition>
     </mc:Choice>
-    <mc:Fallback>
+    <mc:Fallback xmlns="">
       <p:transition spd="slow">
         <p:fade/>
       </p:transition>
@@ -2791,7 +3145,7 @@
           <a:p>
             <a:fld id="{27C52E7B-312F-4F68-B050-DB38E8C31169}" type="datetimeFigureOut">
               <a:rPr lang="hu-HU" smtClean="0"/>
-              <a:t>2025. 02. 15.</a:t>
+              <a:t>2025. 02. 17.</a:t>
             </a:fld>
             <a:endParaRPr lang="hu-HU"/>
           </a:p>
@@ -2861,13 +3215,13 @@
   <p:clrMapOvr>
     <a:masterClrMapping/>
   </p:clrMapOvr>
-  <mc:AlternateContent xmlns:mc="http://schemas.openxmlformats.org/markup-compatibility/2006">
-    <mc:Choice xmlns:p159="http://schemas.microsoft.com/office/powerpoint/2015/09/main" Requires="p159">
+  <mc:AlternateContent xmlns:mc="http://schemas.openxmlformats.org/markup-compatibility/2006" xmlns:p159="http://schemas.microsoft.com/office/powerpoint/2015/09/main">
+    <mc:Choice Requires="p159">
       <p:transition xmlns:p14="http://schemas.microsoft.com/office/powerpoint/2010/main" spd="slow" p14:dur="2000">
         <p159:morph option="byObject"/>
       </p:transition>
     </mc:Choice>
-    <mc:Fallback>
+    <mc:Fallback xmlns="">
       <p:transition spd="slow">
         <p:fade/>
       </p:transition>
@@ -3044,7 +3398,7 @@
           <a:p>
             <a:fld id="{27C52E7B-312F-4F68-B050-DB38E8C31169}" type="datetimeFigureOut">
               <a:rPr lang="hu-HU" smtClean="0"/>
-              <a:t>2025. 02. 15.</a:t>
+              <a:t>2025. 02. 17.</a:t>
             </a:fld>
             <a:endParaRPr lang="hu-HU"/>
           </a:p>
@@ -3161,13 +3515,13 @@
     <p:sldLayoutId id="2147483658" r:id="rId10"/>
     <p:sldLayoutId id="2147483659" r:id="rId11"/>
   </p:sldLayoutIdLst>
-  <mc:AlternateContent xmlns:mc="http://schemas.openxmlformats.org/markup-compatibility/2006">
-    <mc:Choice xmlns:p159="http://schemas.microsoft.com/office/powerpoint/2015/09/main" Requires="p159">
+  <mc:AlternateContent xmlns:mc="http://schemas.openxmlformats.org/markup-compatibility/2006" xmlns:p159="http://schemas.microsoft.com/office/powerpoint/2015/09/main">
+    <mc:Choice Requires="p159">
       <p:transition xmlns:p14="http://schemas.microsoft.com/office/powerpoint/2010/main" spd="slow" p14:dur="2000">
         <p159:morph option="byObject"/>
       </p:transition>
     </mc:Choice>
-    <mc:Fallback>
+    <mc:Fallback xmlns="">
       <p:transition spd="slow">
         <p:fade/>
       </p:transition>
@@ -3621,13 +3975,13 @@
   <p:clrMapOvr>
     <a:masterClrMapping/>
   </p:clrMapOvr>
-  <mc:AlternateContent xmlns:mc="http://schemas.openxmlformats.org/markup-compatibility/2006">
-    <mc:Choice xmlns:p159="http://schemas.microsoft.com/office/powerpoint/2015/09/main" Requires="p159">
+  <mc:AlternateContent xmlns:mc="http://schemas.openxmlformats.org/markup-compatibility/2006" xmlns:p159="http://schemas.microsoft.com/office/powerpoint/2015/09/main">
+    <mc:Choice Requires="p159">
       <p:transition xmlns:p14="http://schemas.microsoft.com/office/powerpoint/2010/main" spd="slow" p14:dur="2000">
         <p159:morph option="byObject"/>
       </p:transition>
     </mc:Choice>
-    <mc:Fallback>
+    <mc:Fallback xmlns="">
       <p:transition spd="slow">
         <p:fade/>
       </p:transition>
@@ -3637,6 +3991,732 @@
 </file>
 
 <file path=ppt/slides/slide2.xml><?xml version="1.0" encoding="utf-8"?>
+<p:sld xmlns:a="http://schemas.openxmlformats.org/drawingml/2006/main" xmlns:r="http://schemas.openxmlformats.org/officeDocument/2006/relationships" xmlns:p="http://schemas.openxmlformats.org/presentationml/2006/main">
+  <p:cSld>
+    <p:spTree>
+      <p:nvGrpSpPr>
+        <p:cNvPr id="1" name="">
+          <a:extLst>
+            <a:ext uri="{FF2B5EF4-FFF2-40B4-BE49-F238E27FC236}">
+              <a16:creationId xmlns:a16="http://schemas.microsoft.com/office/drawing/2014/main" id="{99B9C2E8-9BDC-3C52-D1E9-DCA82232C4CB}"/>
+            </a:ext>
+          </a:extLst>
+        </p:cNvPr>
+        <p:cNvGrpSpPr/>
+        <p:nvPr/>
+      </p:nvGrpSpPr>
+      <p:grpSpPr>
+        <a:xfrm>
+          <a:off x="0" y="0"/>
+          <a:ext cx="0" cy="0"/>
+          <a:chOff x="0" y="0"/>
+          <a:chExt cx="0" cy="0"/>
+        </a:xfrm>
+      </p:grpSpPr>
+      <p:sp>
+        <p:nvSpPr>
+          <p:cNvPr id="3" name="Alcím 2">
+            <a:extLst>
+              <a:ext uri="{FF2B5EF4-FFF2-40B4-BE49-F238E27FC236}">
+                <a16:creationId xmlns:a16="http://schemas.microsoft.com/office/drawing/2014/main" id="{70F68E8F-E438-E592-6188-E1EE9C65AE56}"/>
+              </a:ext>
+            </a:extLst>
+          </p:cNvPr>
+          <p:cNvSpPr>
+            <a:spLocks noGrp="1"/>
+          </p:cNvSpPr>
+          <p:nvPr>
+            <p:ph type="subTitle" idx="1"/>
+          </p:nvPr>
+        </p:nvSpPr>
+        <p:spPr/>
+        <p:txBody>
+          <a:bodyPr/>
+          <a:lstStyle/>
+          <a:p>
+            <a:endParaRPr lang="hu-HU" dirty="0"/>
+          </a:p>
+        </p:txBody>
+      </p:sp>
+      <p:pic>
+        <p:nvPicPr>
+          <p:cNvPr id="5" name="Kép 4">
+            <a:extLst>
+              <a:ext uri="{FF2B5EF4-FFF2-40B4-BE49-F238E27FC236}">
+                <a16:creationId xmlns:a16="http://schemas.microsoft.com/office/drawing/2014/main" id="{E49DA957-2E0B-4093-1051-B4668CBD1D54}"/>
+              </a:ext>
+            </a:extLst>
+          </p:cNvPr>
+          <p:cNvPicPr>
+            <a:picLocks noChangeAspect="1"/>
+          </p:cNvPicPr>
+          <p:nvPr/>
+        </p:nvPicPr>
+        <p:blipFill>
+          <a:blip r:embed="rId2">
+            <a:extLst>
+              <a:ext uri="{28A0092B-C50C-407E-A947-70E740481C1C}">
+                <a14:useLocalDpi xmlns:a14="http://schemas.microsoft.com/office/drawing/2010/main" val="0"/>
+              </a:ext>
+            </a:extLst>
+          </a:blip>
+          <a:stretch>
+            <a:fillRect/>
+          </a:stretch>
+        </p:blipFill>
+        <p:spPr>
+          <a:xfrm>
+            <a:off x="-366216" y="-102998"/>
+            <a:ext cx="12558216" cy="7063996"/>
+          </a:xfrm>
+          <a:prstGeom prst="rect">
+            <a:avLst/>
+          </a:prstGeom>
+        </p:spPr>
+      </p:pic>
+      <p:sp>
+        <p:nvSpPr>
+          <p:cNvPr id="7" name="Szövegdoboz 6">
+            <a:extLst>
+              <a:ext uri="{FF2B5EF4-FFF2-40B4-BE49-F238E27FC236}">
+                <a16:creationId xmlns:a16="http://schemas.microsoft.com/office/drawing/2014/main" id="{DE92A26A-67A3-FC14-3696-48F8A8DD9F5D}"/>
+              </a:ext>
+            </a:extLst>
+          </p:cNvPr>
+          <p:cNvSpPr txBox="1"/>
+          <p:nvPr/>
+        </p:nvSpPr>
+        <p:spPr>
+          <a:xfrm>
+            <a:off x="4842843" y="5188168"/>
+            <a:ext cx="6207760" cy="646331"/>
+          </a:xfrm>
+          <a:prstGeom prst="rect">
+            <a:avLst/>
+          </a:prstGeom>
+          <a:noFill/>
+        </p:spPr>
+        <p:txBody>
+          <a:bodyPr wrap="square">
+            <a:spAutoFit/>
+          </a:bodyPr>
+          <a:lstStyle/>
+          <a:p>
+            <a:pPr marL="0" indent="0" algn="ctr">
+              <a:buNone/>
+            </a:pPr>
+            <a:r>
+              <a:rPr lang="hu-HU" spc="300" dirty="0">
+                <a:solidFill>
+                  <a:schemeClr val="bg1"/>
+                </a:solidFill>
+              </a:rPr>
+              <a:t>A weboldalunk </a:t>
+            </a:r>
+            <a:r>
+              <a:rPr lang="hu-HU" spc="300" dirty="0" err="1">
+                <a:solidFill>
+                  <a:schemeClr val="bg1"/>
+                </a:solidFill>
+              </a:rPr>
+              <a:t>Dwayne</a:t>
+            </a:r>
+            <a:r>
+              <a:rPr lang="hu-HU" spc="300" dirty="0">
+                <a:solidFill>
+                  <a:schemeClr val="bg1"/>
+                </a:solidFill>
+              </a:rPr>
+              <a:t> Johnson életéről, családjáról és karrierjéről szól</a:t>
+            </a:r>
+            <a:endParaRPr lang="hu-HU" spc="300" dirty="0"/>
+          </a:p>
+        </p:txBody>
+      </p:sp>
+      <p:sp>
+        <p:nvSpPr>
+          <p:cNvPr id="10" name="Cím 1">
+            <a:extLst>
+              <a:ext uri="{FF2B5EF4-FFF2-40B4-BE49-F238E27FC236}">
+                <a16:creationId xmlns:a16="http://schemas.microsoft.com/office/drawing/2014/main" id="{497A4F74-8C79-F380-4966-C2321F66BD30}"/>
+              </a:ext>
+            </a:extLst>
+          </p:cNvPr>
+          <p:cNvSpPr txBox="1">
+            <a:spLocks/>
+          </p:cNvSpPr>
+          <p:nvPr/>
+        </p:nvSpPr>
+        <p:spPr>
+          <a:xfrm>
+            <a:off x="4384038" y="586168"/>
+            <a:ext cx="10515601" cy="1312672"/>
+          </a:xfrm>
+          <a:prstGeom prst="rect">
+            <a:avLst/>
+          </a:prstGeom>
+        </p:spPr>
+        <p:txBody>
+          <a:bodyPr vert="horz" lIns="91440" tIns="45720" rIns="91440" bIns="45720" rtlCol="0" anchor="b">
+            <a:normAutofit/>
+          </a:bodyPr>
+          <a:lstStyle>
+            <a:lvl1pPr algn="ctr" defTabSz="914400" rtl="0" eaLnBrk="1" latinLnBrk="0" hangingPunct="1">
+              <a:lnSpc>
+                <a:spcPct val="90000"/>
+              </a:lnSpc>
+              <a:spcBef>
+                <a:spcPct val="0"/>
+              </a:spcBef>
+              <a:buNone/>
+              <a:defRPr sz="6000" kern="1200">
+                <a:solidFill>
+                  <a:schemeClr val="tx1"/>
+                </a:solidFill>
+                <a:latin typeface="+mj-lt"/>
+                <a:ea typeface="+mj-ea"/>
+                <a:cs typeface="+mj-cs"/>
+              </a:defRPr>
+            </a:lvl1pPr>
+          </a:lstStyle>
+          <a:p>
+            <a:r>
+              <a:rPr lang="hu-HU" sz="6600" b="1" dirty="0">
+                <a:solidFill>
+                  <a:schemeClr val="bg1"/>
+                </a:solidFill>
+                <a:latin typeface="+mn-lt"/>
+              </a:rPr>
+              <a:t>Téma</a:t>
+            </a:r>
+            <a:endParaRPr lang="hu-HU" sz="6600" b="1" dirty="0">
+              <a:latin typeface="+mn-lt"/>
+            </a:endParaRPr>
+          </a:p>
+        </p:txBody>
+      </p:sp>
+    </p:spTree>
+    <p:extLst>
+      <p:ext uri="{BB962C8B-B14F-4D97-AF65-F5344CB8AC3E}">
+        <p14:creationId xmlns:p14="http://schemas.microsoft.com/office/powerpoint/2010/main" val="579366693"/>
+      </p:ext>
+    </p:extLst>
+  </p:cSld>
+  <p:clrMapOvr>
+    <a:masterClrMapping/>
+  </p:clrMapOvr>
+  <p:transition spd="slow">
+    <p:push dir="u"/>
+  </p:transition>
+</p:sld>
+</file>
+
+<file path=ppt/slides/slide3.xml><?xml version="1.0" encoding="utf-8"?>
+<p:sld xmlns:a="http://schemas.openxmlformats.org/drawingml/2006/main" xmlns:r="http://schemas.openxmlformats.org/officeDocument/2006/relationships" xmlns:p="http://schemas.openxmlformats.org/presentationml/2006/main">
+  <p:cSld>
+    <p:spTree>
+      <p:nvGrpSpPr>
+        <p:cNvPr id="1" name="">
+          <a:extLst>
+            <a:ext uri="{FF2B5EF4-FFF2-40B4-BE49-F238E27FC236}">
+              <a16:creationId xmlns:a16="http://schemas.microsoft.com/office/drawing/2014/main" id="{99716D1F-EEBB-B631-6B38-7C8ABCB5CE97}"/>
+            </a:ext>
+          </a:extLst>
+        </p:cNvPr>
+        <p:cNvGrpSpPr/>
+        <p:nvPr/>
+      </p:nvGrpSpPr>
+      <p:grpSpPr>
+        <a:xfrm>
+          <a:off x="0" y="0"/>
+          <a:ext cx="0" cy="0"/>
+          <a:chOff x="0" y="0"/>
+          <a:chExt cx="0" cy="0"/>
+        </a:xfrm>
+      </p:grpSpPr>
+      <p:sp>
+        <p:nvSpPr>
+          <p:cNvPr id="3" name="Alcím 2">
+            <a:extLst>
+              <a:ext uri="{FF2B5EF4-FFF2-40B4-BE49-F238E27FC236}">
+                <a16:creationId xmlns:a16="http://schemas.microsoft.com/office/drawing/2014/main" id="{8ADD4051-D019-DD3E-D70D-1CD60D7A3F44}"/>
+              </a:ext>
+            </a:extLst>
+          </p:cNvPr>
+          <p:cNvSpPr>
+            <a:spLocks noGrp="1"/>
+          </p:cNvSpPr>
+          <p:nvPr>
+            <p:ph type="subTitle" idx="1"/>
+          </p:nvPr>
+        </p:nvSpPr>
+        <p:spPr/>
+        <p:txBody>
+          <a:bodyPr/>
+          <a:lstStyle/>
+          <a:p>
+            <a:endParaRPr lang="hu-HU" dirty="0"/>
+          </a:p>
+        </p:txBody>
+      </p:sp>
+      <p:pic>
+        <p:nvPicPr>
+          <p:cNvPr id="5" name="Kép 4">
+            <a:extLst>
+              <a:ext uri="{FF2B5EF4-FFF2-40B4-BE49-F238E27FC236}">
+                <a16:creationId xmlns:a16="http://schemas.microsoft.com/office/drawing/2014/main" id="{CC5BA887-A5DD-7208-A91F-BC4676D224C6}"/>
+              </a:ext>
+            </a:extLst>
+          </p:cNvPr>
+          <p:cNvPicPr>
+            <a:picLocks noChangeAspect="1"/>
+          </p:cNvPicPr>
+          <p:nvPr/>
+        </p:nvPicPr>
+        <p:blipFill>
+          <a:blip r:embed="rId2">
+            <a:extLst>
+              <a:ext uri="{28A0092B-C50C-407E-A947-70E740481C1C}">
+                <a14:useLocalDpi xmlns:a14="http://schemas.microsoft.com/office/drawing/2010/main" val="0"/>
+              </a:ext>
+            </a:extLst>
+          </a:blip>
+          <a:stretch>
+            <a:fillRect/>
+          </a:stretch>
+        </p:blipFill>
+        <p:spPr>
+          <a:xfrm>
+            <a:off x="-366216" y="0"/>
+            <a:ext cx="12558216" cy="7063996"/>
+          </a:xfrm>
+          <a:prstGeom prst="rect">
+            <a:avLst/>
+          </a:prstGeom>
+        </p:spPr>
+      </p:pic>
+      <p:sp>
+        <p:nvSpPr>
+          <p:cNvPr id="7" name="Szövegdoboz 6">
+            <a:extLst>
+              <a:ext uri="{FF2B5EF4-FFF2-40B4-BE49-F238E27FC236}">
+                <a16:creationId xmlns:a16="http://schemas.microsoft.com/office/drawing/2014/main" id="{4D4E6FB5-3830-2CB2-413C-BED0D367E193}"/>
+              </a:ext>
+            </a:extLst>
+          </p:cNvPr>
+          <p:cNvSpPr txBox="1"/>
+          <p:nvPr/>
+        </p:nvSpPr>
+        <p:spPr>
+          <a:xfrm>
+            <a:off x="619760" y="269566"/>
+            <a:ext cx="7874000" cy="4985980"/>
+          </a:xfrm>
+          <a:prstGeom prst="rect">
+            <a:avLst/>
+          </a:prstGeom>
+          <a:noFill/>
+        </p:spPr>
+        <p:txBody>
+          <a:bodyPr wrap="square">
+            <a:spAutoFit/>
+          </a:bodyPr>
+          <a:lstStyle/>
+          <a:p>
+            <a:pPr marL="0" indent="0" algn="ctr">
+              <a:lnSpc>
+                <a:spcPct val="250000"/>
+              </a:lnSpc>
+              <a:buNone/>
+            </a:pPr>
+            <a:r>
+              <a:rPr lang="hu-HU" sz="4000" b="1" noProof="1">
+                <a:solidFill>
+                  <a:schemeClr val="bg1"/>
+                </a:solidFill>
+              </a:rPr>
+              <a:t>Glázer Ármin Dominik </a:t>
+            </a:r>
+            <a:r>
+              <a:rPr lang="hu-HU" sz="4000" noProof="1">
+                <a:solidFill>
+                  <a:schemeClr val="bg1"/>
+                </a:solidFill>
+              </a:rPr>
+              <a:t>- 42 commit</a:t>
+            </a:r>
+          </a:p>
+          <a:p>
+            <a:pPr marL="0" indent="0" algn="ctr">
+              <a:lnSpc>
+                <a:spcPct val="250000"/>
+              </a:lnSpc>
+              <a:buNone/>
+            </a:pPr>
+            <a:r>
+              <a:rPr lang="hu-HU" sz="4000" b="1" noProof="1">
+                <a:solidFill>
+                  <a:schemeClr val="bg1"/>
+                </a:solidFill>
+              </a:rPr>
+              <a:t>Boksay Levente </a:t>
+            </a:r>
+            <a:r>
+              <a:rPr lang="hu-HU" sz="4000" noProof="1">
+                <a:solidFill>
+                  <a:schemeClr val="bg1"/>
+                </a:solidFill>
+              </a:rPr>
+              <a:t>- 70 commit</a:t>
+            </a:r>
+          </a:p>
+          <a:p>
+            <a:pPr marL="0" indent="0" algn="ctr">
+              <a:lnSpc>
+                <a:spcPct val="250000"/>
+              </a:lnSpc>
+              <a:buNone/>
+            </a:pPr>
+            <a:r>
+              <a:rPr lang="hu-HU" sz="4000" b="1" noProof="1">
+                <a:solidFill>
+                  <a:schemeClr val="bg1"/>
+                </a:solidFill>
+              </a:rPr>
+              <a:t>Győr Norbert </a:t>
+            </a:r>
+            <a:r>
+              <a:rPr lang="hu-HU" sz="4000" noProof="1">
+                <a:solidFill>
+                  <a:schemeClr val="bg1"/>
+                </a:solidFill>
+              </a:rPr>
+              <a:t>- 17 commit</a:t>
+            </a:r>
+          </a:p>
+          <a:p>
+            <a:pPr marL="0" indent="0" algn="ctr">
+              <a:buNone/>
+            </a:pPr>
+            <a:endParaRPr lang="hu-HU" spc="300" dirty="0"/>
+          </a:p>
+        </p:txBody>
+      </p:sp>
+      <p:sp>
+        <p:nvSpPr>
+          <p:cNvPr id="10" name="Cím 1">
+            <a:extLst>
+              <a:ext uri="{FF2B5EF4-FFF2-40B4-BE49-F238E27FC236}">
+                <a16:creationId xmlns:a16="http://schemas.microsoft.com/office/drawing/2014/main" id="{652FA4C7-BB99-0741-93BA-E0B5428CF6ED}"/>
+              </a:ext>
+            </a:extLst>
+          </p:cNvPr>
+          <p:cNvSpPr txBox="1">
+            <a:spLocks/>
+          </p:cNvSpPr>
+          <p:nvPr/>
+        </p:nvSpPr>
+        <p:spPr>
+          <a:xfrm>
+            <a:off x="4556760" y="2106220"/>
+            <a:ext cx="10515601" cy="1312672"/>
+          </a:xfrm>
+          <a:prstGeom prst="rect">
+            <a:avLst/>
+          </a:prstGeom>
+        </p:spPr>
+        <p:txBody>
+          <a:bodyPr vert="horz" lIns="91440" tIns="45720" rIns="91440" bIns="45720" rtlCol="0" anchor="b">
+            <a:normAutofit/>
+          </a:bodyPr>
+          <a:lstStyle>
+            <a:lvl1pPr algn="ctr" defTabSz="914400" rtl="0" eaLnBrk="1" latinLnBrk="0" hangingPunct="1">
+              <a:lnSpc>
+                <a:spcPct val="90000"/>
+              </a:lnSpc>
+              <a:spcBef>
+                <a:spcPct val="0"/>
+              </a:spcBef>
+              <a:buNone/>
+              <a:defRPr sz="6000" kern="1200">
+                <a:solidFill>
+                  <a:schemeClr val="tx1"/>
+                </a:solidFill>
+                <a:latin typeface="+mj-lt"/>
+                <a:ea typeface="+mj-ea"/>
+                <a:cs typeface="+mj-cs"/>
+              </a:defRPr>
+            </a:lvl1pPr>
+          </a:lstStyle>
+          <a:p>
+            <a:r>
+              <a:rPr lang="hu-HU" sz="6600" b="1" dirty="0" err="1">
+                <a:solidFill>
+                  <a:schemeClr val="bg1"/>
+                </a:solidFill>
+                <a:latin typeface="+mn-lt"/>
+              </a:rPr>
+              <a:t>Készítőkröl</a:t>
+            </a:r>
+            <a:endParaRPr lang="hu-HU" sz="6600" b="1" dirty="0">
+              <a:latin typeface="+mn-lt"/>
+            </a:endParaRPr>
+          </a:p>
+        </p:txBody>
+      </p:sp>
+    </p:spTree>
+    <p:extLst>
+      <p:ext uri="{BB962C8B-B14F-4D97-AF65-F5344CB8AC3E}">
+        <p14:creationId xmlns:p14="http://schemas.microsoft.com/office/powerpoint/2010/main" val="3901236405"/>
+      </p:ext>
+    </p:extLst>
+  </p:cSld>
+  <p:clrMapOvr>
+    <a:masterClrMapping/>
+  </p:clrMapOvr>
+  <p:transition spd="slow">
+    <p:push dir="u"/>
+  </p:transition>
+</p:sld>
+</file>
+
+<file path=ppt/slides/slide4.xml><?xml version="1.0" encoding="utf-8"?>
+<p:sld xmlns:a="http://schemas.openxmlformats.org/drawingml/2006/main" xmlns:r="http://schemas.openxmlformats.org/officeDocument/2006/relationships" xmlns:p="http://schemas.openxmlformats.org/presentationml/2006/main">
+  <p:cSld>
+    <p:spTree>
+      <p:nvGrpSpPr>
+        <p:cNvPr id="1" name="">
+          <a:extLst>
+            <a:ext uri="{FF2B5EF4-FFF2-40B4-BE49-F238E27FC236}">
+              <a16:creationId xmlns:a16="http://schemas.microsoft.com/office/drawing/2014/main" id="{8D03EFEC-925F-C8A7-AEAB-0E1AB2B4ABBE}"/>
+            </a:ext>
+          </a:extLst>
+        </p:cNvPr>
+        <p:cNvGrpSpPr/>
+        <p:nvPr/>
+      </p:nvGrpSpPr>
+      <p:grpSpPr>
+        <a:xfrm>
+          <a:off x="0" y="0"/>
+          <a:ext cx="0" cy="0"/>
+          <a:chOff x="0" y="0"/>
+          <a:chExt cx="0" cy="0"/>
+        </a:xfrm>
+      </p:grpSpPr>
+      <p:sp>
+        <p:nvSpPr>
+          <p:cNvPr id="3" name="Alcím 2">
+            <a:extLst>
+              <a:ext uri="{FF2B5EF4-FFF2-40B4-BE49-F238E27FC236}">
+                <a16:creationId xmlns:a16="http://schemas.microsoft.com/office/drawing/2014/main" id="{CFFA206B-27AB-6FCA-497F-E00EB5306AA3}"/>
+              </a:ext>
+            </a:extLst>
+          </p:cNvPr>
+          <p:cNvSpPr>
+            <a:spLocks noGrp="1"/>
+          </p:cNvSpPr>
+          <p:nvPr>
+            <p:ph type="subTitle" idx="1"/>
+          </p:nvPr>
+        </p:nvSpPr>
+        <p:spPr/>
+        <p:txBody>
+          <a:bodyPr/>
+          <a:lstStyle/>
+          <a:p>
+            <a:endParaRPr lang="hu-HU" dirty="0"/>
+          </a:p>
+        </p:txBody>
+      </p:sp>
+      <p:pic>
+        <p:nvPicPr>
+          <p:cNvPr id="5" name="Kép 4">
+            <a:extLst>
+              <a:ext uri="{FF2B5EF4-FFF2-40B4-BE49-F238E27FC236}">
+                <a16:creationId xmlns:a16="http://schemas.microsoft.com/office/drawing/2014/main" id="{DA31DD95-5685-0203-9A29-98FDA4311C64}"/>
+              </a:ext>
+            </a:extLst>
+          </p:cNvPr>
+          <p:cNvPicPr>
+            <a:picLocks noChangeAspect="1"/>
+          </p:cNvPicPr>
+          <p:nvPr/>
+        </p:nvPicPr>
+        <p:blipFill>
+          <a:blip r:embed="rId2">
+            <a:extLst>
+              <a:ext uri="{28A0092B-C50C-407E-A947-70E740481C1C}">
+                <a14:useLocalDpi xmlns:a14="http://schemas.microsoft.com/office/drawing/2010/main" val="0"/>
+              </a:ext>
+            </a:extLst>
+          </a:blip>
+          <a:stretch>
+            <a:fillRect/>
+          </a:stretch>
+        </p:blipFill>
+        <p:spPr>
+          <a:xfrm>
+            <a:off x="-183108" y="-39945"/>
+            <a:ext cx="12558216" cy="6897944"/>
+          </a:xfrm>
+          <a:prstGeom prst="rect">
+            <a:avLst/>
+          </a:prstGeom>
+        </p:spPr>
+      </p:pic>
+      <p:sp>
+        <p:nvSpPr>
+          <p:cNvPr id="10" name="Cím 1">
+            <a:extLst>
+              <a:ext uri="{FF2B5EF4-FFF2-40B4-BE49-F238E27FC236}">
+                <a16:creationId xmlns:a16="http://schemas.microsoft.com/office/drawing/2014/main" id="{08825203-F4FB-1765-0DA8-A7DB75514F57}"/>
+              </a:ext>
+            </a:extLst>
+          </p:cNvPr>
+          <p:cNvSpPr txBox="1">
+            <a:spLocks/>
+          </p:cNvSpPr>
+          <p:nvPr/>
+        </p:nvSpPr>
+        <p:spPr>
+          <a:xfrm>
+            <a:off x="2514600" y="2121408"/>
+            <a:ext cx="10515601" cy="1312672"/>
+          </a:xfrm>
+          <a:prstGeom prst="rect">
+            <a:avLst/>
+          </a:prstGeom>
+        </p:spPr>
+        <p:txBody>
+          <a:bodyPr vert="horz" lIns="91440" tIns="45720" rIns="91440" bIns="45720" rtlCol="0" anchor="b">
+            <a:normAutofit/>
+          </a:bodyPr>
+          <a:lstStyle>
+            <a:lvl1pPr algn="ctr" defTabSz="914400" rtl="0" eaLnBrk="1" latinLnBrk="0" hangingPunct="1">
+              <a:lnSpc>
+                <a:spcPct val="90000"/>
+              </a:lnSpc>
+              <a:spcBef>
+                <a:spcPct val="0"/>
+              </a:spcBef>
+              <a:buNone/>
+              <a:defRPr sz="6000" kern="1200">
+                <a:solidFill>
+                  <a:schemeClr val="tx1"/>
+                </a:solidFill>
+                <a:latin typeface="+mj-lt"/>
+                <a:ea typeface="+mj-ea"/>
+                <a:cs typeface="+mj-cs"/>
+              </a:defRPr>
+            </a:lvl1pPr>
+          </a:lstStyle>
+          <a:p>
+            <a:r>
+              <a:rPr lang="hu-HU" sz="6600" b="1" dirty="0">
+                <a:solidFill>
+                  <a:schemeClr val="bg1"/>
+                </a:solidFill>
+                <a:latin typeface="+mn-lt"/>
+              </a:rPr>
+              <a:t>Használt nyelvek</a:t>
+            </a:r>
+            <a:endParaRPr lang="hu-HU" sz="6600" b="1" dirty="0">
+              <a:latin typeface="+mn-lt"/>
+            </a:endParaRPr>
+          </a:p>
+        </p:txBody>
+      </p:sp>
+      <p:sp>
+        <p:nvSpPr>
+          <p:cNvPr id="4" name="Szövegdoboz 3">
+            <a:extLst>
+              <a:ext uri="{FF2B5EF4-FFF2-40B4-BE49-F238E27FC236}">
+                <a16:creationId xmlns:a16="http://schemas.microsoft.com/office/drawing/2014/main" id="{ECD129D3-DB8C-F69E-28B7-3D7FF14E563B}"/>
+              </a:ext>
+            </a:extLst>
+          </p:cNvPr>
+          <p:cNvSpPr txBox="1"/>
+          <p:nvPr/>
+        </p:nvSpPr>
+        <p:spPr>
+          <a:xfrm>
+            <a:off x="620216" y="960825"/>
+            <a:ext cx="7721600" cy="4896405"/>
+          </a:xfrm>
+          <a:prstGeom prst="rect">
+            <a:avLst/>
+          </a:prstGeom>
+          <a:noFill/>
+        </p:spPr>
+        <p:txBody>
+          <a:bodyPr wrap="square">
+            <a:spAutoFit/>
+          </a:bodyPr>
+          <a:lstStyle/>
+          <a:p>
+            <a:pPr>
+              <a:lnSpc>
+                <a:spcPct val="250000"/>
+              </a:lnSpc>
+            </a:pPr>
+            <a:r>
+              <a:rPr lang="hu-HU" sz="4400" dirty="0">
+                <a:solidFill>
+                  <a:schemeClr val="bg1"/>
+                </a:solidFill>
+              </a:rPr>
+              <a:t>HTML 71.4%</a:t>
+            </a:r>
+          </a:p>
+          <a:p>
+            <a:pPr>
+              <a:lnSpc>
+                <a:spcPct val="250000"/>
+              </a:lnSpc>
+            </a:pPr>
+            <a:r>
+              <a:rPr lang="hu-HU" sz="4400" dirty="0">
+                <a:solidFill>
+                  <a:schemeClr val="bg1"/>
+                </a:solidFill>
+              </a:rPr>
+              <a:t>CSS 15.5%</a:t>
+            </a:r>
+          </a:p>
+          <a:p>
+            <a:pPr>
+              <a:lnSpc>
+                <a:spcPct val="250000"/>
+              </a:lnSpc>
+            </a:pPr>
+            <a:r>
+              <a:rPr lang="hu-HU" sz="4400" dirty="0">
+                <a:solidFill>
+                  <a:schemeClr val="bg1"/>
+                </a:solidFill>
+              </a:rPr>
+              <a:t>JavaScript 13.1%</a:t>
+            </a:r>
+          </a:p>
+        </p:txBody>
+      </p:sp>
+    </p:spTree>
+    <p:extLst>
+      <p:ext uri="{BB962C8B-B14F-4D97-AF65-F5344CB8AC3E}">
+        <p14:creationId xmlns:p14="http://schemas.microsoft.com/office/powerpoint/2010/main" val="115850534"/>
+      </p:ext>
+    </p:extLst>
+  </p:cSld>
+  <p:clrMapOvr>
+    <a:masterClrMapping/>
+  </p:clrMapOvr>
+  <p:transition spd="slow">
+    <p:push dir="u"/>
+  </p:transition>
+</p:sld>
+</file>
+
+<file path=ppt/slides/slide5.xml><?xml version="1.0" encoding="utf-8"?>
 <p:sld xmlns:a="http://schemas.openxmlformats.org/drawingml/2006/main" xmlns:r="http://schemas.openxmlformats.org/officeDocument/2006/relationships" xmlns:p="http://schemas.openxmlformats.org/presentationml/2006/main">
   <p:cSld>
     <p:spTree>
@@ -3658,114 +4738,79 @@
           <p:cNvPr id="2" name="Cím 1">
             <a:extLst>
               <a:ext uri="{FF2B5EF4-FFF2-40B4-BE49-F238E27FC236}">
-                <a16:creationId xmlns:a16="http://schemas.microsoft.com/office/drawing/2014/main" id="{44A42860-5411-4497-B099-E91FCA688DC2}"/>
-              </a:ext>
-            </a:extLst>
-          </p:cNvPr>
-          <p:cNvSpPr>
-            <a:spLocks noGrp="1"/>
-          </p:cNvSpPr>
-          <p:nvPr>
-            <p:ph type="title"/>
-          </p:nvPr>
-        </p:nvSpPr>
-        <p:spPr>
-          <a:xfrm>
-            <a:off x="838198" y="365127"/>
-            <a:ext cx="10515601" cy="1312672"/>
-          </a:xfrm>
-        </p:spPr>
-        <p:txBody>
-          <a:bodyPr>
-            <a:normAutofit/>
-          </a:bodyPr>
-          <a:lstStyle/>
-          <a:p>
-            <a:pPr algn="ctr"/>
-            <a:r>
-              <a:rPr lang="hu-HU" sz="6600" b="1" dirty="0">
-                <a:latin typeface="+mn-lt"/>
-              </a:rPr>
-              <a:t>Téma</a:t>
-            </a:r>
-          </a:p>
-        </p:txBody>
-      </p:sp>
-      <p:sp>
-        <p:nvSpPr>
-          <p:cNvPr id="3" name="Tartalom helye 2">
-            <a:extLst>
-              <a:ext uri="{FF2B5EF4-FFF2-40B4-BE49-F238E27FC236}">
-                <a16:creationId xmlns:a16="http://schemas.microsoft.com/office/drawing/2014/main" id="{7FAFD67E-8314-40F2-923D-5FB88D4E87A9}"/>
-              </a:ext>
-            </a:extLst>
-          </p:cNvPr>
-          <p:cNvSpPr>
-            <a:spLocks noGrp="1"/>
-          </p:cNvSpPr>
-          <p:nvPr>
-            <p:ph idx="1"/>
-          </p:nvPr>
-        </p:nvSpPr>
-        <p:spPr>
-          <a:xfrm>
-            <a:off x="0" y="3204595"/>
-            <a:ext cx="12192000" cy="4272661"/>
-          </a:xfrm>
-        </p:spPr>
+                <a16:creationId xmlns:a16="http://schemas.microsoft.com/office/drawing/2014/main" id="{41F2EE23-0876-D30E-6AC7-12AE89683983}"/>
+              </a:ext>
+            </a:extLst>
+          </p:cNvPr>
+          <p:cNvSpPr>
+            <a:spLocks noGrp="1"/>
+          </p:cNvSpPr>
+          <p:nvPr>
+            <p:ph type="ctrTitle"/>
+          </p:nvPr>
+        </p:nvSpPr>
+        <p:spPr/>
         <p:txBody>
           <a:bodyPr/>
           <a:lstStyle/>
           <a:p>
-            <a:pPr marL="0" indent="0" algn="ctr">
-              <a:buNone/>
-            </a:pPr>
-            <a:r>
-              <a:rPr lang="hu-HU" spc="300" dirty="0"/>
-              <a:t>A weboldalunk </a:t>
-            </a:r>
-            <a:r>
-              <a:rPr lang="hu-HU" spc="300" dirty="0" err="1"/>
-              <a:t>Dwayne</a:t>
-            </a:r>
-            <a:r>
-              <a:rPr lang="hu-HU" spc="300" dirty="0"/>
-              <a:t> Johnson életéről, családjáról és karrierjét mutatja be.</a:t>
-            </a:r>
+            <a:endParaRPr lang="hu-HU" dirty="0"/>
+          </a:p>
+        </p:txBody>
+      </p:sp>
+      <p:sp>
+        <p:nvSpPr>
+          <p:cNvPr id="3" name="Alcím 2">
+            <a:extLst>
+              <a:ext uri="{FF2B5EF4-FFF2-40B4-BE49-F238E27FC236}">
+                <a16:creationId xmlns:a16="http://schemas.microsoft.com/office/drawing/2014/main" id="{92F4B834-72AC-5ADE-8E72-A7F9CA15F207}"/>
+              </a:ext>
+            </a:extLst>
+          </p:cNvPr>
+          <p:cNvSpPr>
+            <a:spLocks noGrp="1"/>
+          </p:cNvSpPr>
+          <p:nvPr>
+            <p:ph type="subTitle" idx="1"/>
+          </p:nvPr>
+        </p:nvSpPr>
+        <p:spPr/>
+        <p:txBody>
+          <a:bodyPr/>
+          <a:lstStyle/>
+          <a:p>
+            <a:endParaRPr lang="hu-HU"/>
           </a:p>
         </p:txBody>
       </p:sp>
     </p:spTree>
     <p:extLst>
       <p:ext uri="{BB962C8B-B14F-4D97-AF65-F5344CB8AC3E}">
-        <p14:creationId xmlns:p14="http://schemas.microsoft.com/office/powerpoint/2010/main" val="3645890584"/>
+        <p14:creationId xmlns:p14="http://schemas.microsoft.com/office/powerpoint/2010/main" val="2041281869"/>
       </p:ext>
     </p:extLst>
   </p:cSld>
   <p:clrMapOvr>
     <a:masterClrMapping/>
   </p:clrMapOvr>
-  <mc:AlternateContent xmlns:mc="http://schemas.openxmlformats.org/markup-compatibility/2006">
-    <mc:Choice xmlns:p159="http://schemas.microsoft.com/office/powerpoint/2015/09/main" Requires="p159">
-      <p:transition xmlns:p14="http://schemas.microsoft.com/office/powerpoint/2010/main" spd="slow" p14:dur="2000">
-        <p159:morph option="byObject"/>
-      </p:transition>
-    </mc:Choice>
-    <mc:Fallback>
-      <p:transition spd="slow">
-        <p:fade/>
-      </p:transition>
-    </mc:Fallback>
-  </mc:AlternateContent>
+  <p:transition spd="slow">
+    <p:push dir="u"/>
+  </p:transition>
 </p:sld>
 </file>
 
-<file path=ppt/slides/slide3.xml><?xml version="1.0" encoding="utf-8"?>
+<file path=ppt/slides/slide6.xml><?xml version="1.0" encoding="utf-8"?>
 <p:sld xmlns:a="http://schemas.openxmlformats.org/drawingml/2006/main" xmlns:r="http://schemas.openxmlformats.org/officeDocument/2006/relationships" xmlns:p="http://schemas.openxmlformats.org/presentationml/2006/main">
   <p:cSld>
     <p:spTree>
       <p:nvGrpSpPr>
-        <p:cNvPr id="1" name=""/>
+        <p:cNvPr id="1" name="">
+          <a:extLst>
+            <a:ext uri="{FF2B5EF4-FFF2-40B4-BE49-F238E27FC236}">
+              <a16:creationId xmlns:a16="http://schemas.microsoft.com/office/drawing/2014/main" id="{AFD2B4DD-D451-EC3A-1CA7-5F1FD56E2FC0}"/>
+            </a:ext>
+          </a:extLst>
+        </p:cNvPr>
         <p:cNvGrpSpPr/>
         <p:nvPr/>
       </p:nvGrpSpPr>
@@ -3779,99 +4824,120 @@
       </p:grpSpPr>
       <p:sp>
         <p:nvSpPr>
-          <p:cNvPr id="2" name="Cím 1">
-            <a:extLst>
-              <a:ext uri="{FF2B5EF4-FFF2-40B4-BE49-F238E27FC236}">
-                <a16:creationId xmlns:a16="http://schemas.microsoft.com/office/drawing/2014/main" id="{03FB9908-82B0-D1F5-2745-00063762E5AD}"/>
-              </a:ext>
-            </a:extLst>
-          </p:cNvPr>
-          <p:cNvSpPr>
-            <a:spLocks noGrp="1"/>
-          </p:cNvSpPr>
-          <p:nvPr>
-            <p:ph type="title"/>
+          <p:cNvPr id="3" name="Alcím 2">
+            <a:extLst>
+              <a:ext uri="{FF2B5EF4-FFF2-40B4-BE49-F238E27FC236}">
+                <a16:creationId xmlns:a16="http://schemas.microsoft.com/office/drawing/2014/main" id="{E168C0E6-F6E6-08DE-2284-BC6A00EBEAAC}"/>
+              </a:ext>
+            </a:extLst>
+          </p:cNvPr>
+          <p:cNvSpPr>
+            <a:spLocks noGrp="1"/>
+          </p:cNvSpPr>
+          <p:nvPr>
+            <p:ph type="subTitle" idx="1"/>
           </p:nvPr>
         </p:nvSpPr>
         <p:spPr/>
         <p:txBody>
-          <a:bodyPr>
+          <a:bodyPr/>
+          <a:lstStyle/>
+          <a:p>
+            <a:endParaRPr lang="hu-HU" dirty="0"/>
+          </a:p>
+        </p:txBody>
+      </p:sp>
+      <p:pic>
+        <p:nvPicPr>
+          <p:cNvPr id="5" name="Kép 4">
+            <a:extLst>
+              <a:ext uri="{FF2B5EF4-FFF2-40B4-BE49-F238E27FC236}">
+                <a16:creationId xmlns:a16="http://schemas.microsoft.com/office/drawing/2014/main" id="{315953E4-5498-9728-05BA-718A54AC77E3}"/>
+              </a:ext>
+            </a:extLst>
+          </p:cNvPr>
+          <p:cNvPicPr>
+            <a:picLocks noChangeAspect="1"/>
+          </p:cNvPicPr>
+          <p:nvPr/>
+        </p:nvPicPr>
+        <p:blipFill>
+          <a:blip r:embed="rId2">
+            <a:extLst>
+              <a:ext uri="{28A0092B-C50C-407E-A947-70E740481C1C}">
+                <a14:useLocalDpi xmlns:a14="http://schemas.microsoft.com/office/drawing/2010/main" val="0"/>
+              </a:ext>
+            </a:extLst>
+          </a:blip>
+          <a:stretch>
+            <a:fillRect/>
+          </a:stretch>
+        </p:blipFill>
+        <p:spPr>
+          <a:xfrm>
+            <a:off x="-183108" y="-39945"/>
+            <a:ext cx="12558216" cy="6897944"/>
+          </a:xfrm>
+          <a:prstGeom prst="rect">
+            <a:avLst/>
+          </a:prstGeom>
+        </p:spPr>
+      </p:pic>
+      <p:sp>
+        <p:nvSpPr>
+          <p:cNvPr id="10" name="Cím 1">
+            <a:extLst>
+              <a:ext uri="{FF2B5EF4-FFF2-40B4-BE49-F238E27FC236}">
+                <a16:creationId xmlns:a16="http://schemas.microsoft.com/office/drawing/2014/main" id="{2CAB7748-DE47-A793-3C07-6D86FBB5BEC9}"/>
+              </a:ext>
+            </a:extLst>
+          </p:cNvPr>
+          <p:cNvSpPr txBox="1">
+            <a:spLocks/>
+          </p:cNvSpPr>
+          <p:nvPr/>
+        </p:nvSpPr>
+        <p:spPr>
+          <a:xfrm>
+            <a:off x="3175000" y="1716256"/>
+            <a:ext cx="10515601" cy="1312672"/>
+          </a:xfrm>
+          <a:prstGeom prst="rect">
+            <a:avLst/>
+          </a:prstGeom>
+        </p:spPr>
+        <p:txBody>
+          <a:bodyPr vert="horz" lIns="91440" tIns="45720" rIns="91440" bIns="45720" rtlCol="0" anchor="b">
             <a:normAutofit/>
           </a:bodyPr>
-          <a:lstStyle/>
-          <a:p>
-            <a:pPr algn="ctr"/>
-            <a:r>
-              <a:rPr lang="hu-HU" sz="5400" b="1" noProof="1">
+          <a:lstStyle>
+            <a:lvl1pPr algn="ctr" defTabSz="914400" rtl="0" eaLnBrk="1" latinLnBrk="0" hangingPunct="1">
+              <a:lnSpc>
+                <a:spcPct val="90000"/>
+              </a:lnSpc>
+              <a:spcBef>
+                <a:spcPct val="0"/>
+              </a:spcBef>
+              <a:buNone/>
+              <a:defRPr sz="6000" kern="1200">
+                <a:solidFill>
+                  <a:schemeClr val="tx1"/>
+                </a:solidFill>
+                <a:latin typeface="+mj-lt"/>
+                <a:ea typeface="+mj-ea"/>
+                <a:cs typeface="+mj-cs"/>
+              </a:defRPr>
+            </a:lvl1pPr>
+          </a:lstStyle>
+          <a:p>
+            <a:r>
+              <a:rPr lang="hu-HU" sz="6600" b="1" dirty="0">
+                <a:solidFill>
+                  <a:schemeClr val="bg1"/>
+                </a:solidFill>
                 <a:latin typeface="+mn-lt"/>
               </a:rPr>
-              <a:t>		Készítők </a:t>
-            </a:r>
-            <a:r>
-              <a:rPr lang="hu-HU" sz="1300" noProof="1">
-                <a:latin typeface="+mn-lt"/>
-              </a:rPr>
-              <a:t>(készült a github adatai alapján)</a:t>
-            </a:r>
-          </a:p>
-        </p:txBody>
-      </p:sp>
-      <p:sp>
-        <p:nvSpPr>
-          <p:cNvPr id="3" name="Tartalom helye 2">
-            <a:extLst>
-              <a:ext uri="{FF2B5EF4-FFF2-40B4-BE49-F238E27FC236}">
-                <a16:creationId xmlns:a16="http://schemas.microsoft.com/office/drawing/2014/main" id="{605C9E5B-76CB-A94A-6A81-99154E78C3E3}"/>
-              </a:ext>
-            </a:extLst>
-          </p:cNvPr>
-          <p:cNvSpPr>
-            <a:spLocks noGrp="1"/>
-          </p:cNvSpPr>
-          <p:nvPr>
-            <p:ph idx="1"/>
-          </p:nvPr>
-        </p:nvSpPr>
-        <p:spPr/>
-        <p:txBody>
-          <a:bodyPr>
-            <a:normAutofit/>
-          </a:bodyPr>
-          <a:lstStyle/>
-          <a:p>
-            <a:pPr marL="0" indent="0" algn="ctr">
-              <a:lnSpc>
-                <a:spcPct val="250000"/>
-              </a:lnSpc>
-              <a:buNone/>
-            </a:pPr>
-            <a:r>
-              <a:rPr lang="hu-HU" sz="3600" noProof="1"/>
-              <a:t>Glázer Ármin Dominik - 42 commit</a:t>
-            </a:r>
-          </a:p>
-          <a:p>
-            <a:pPr marL="0" indent="0" algn="ctr">
-              <a:lnSpc>
-                <a:spcPct val="250000"/>
-              </a:lnSpc>
-              <a:buNone/>
-            </a:pPr>
-            <a:r>
-              <a:rPr lang="hu-HU" sz="3600" noProof="1"/>
-              <a:t>Boksay Levente - 70 commit</a:t>
-            </a:r>
-          </a:p>
-          <a:p>
-            <a:pPr marL="0" indent="0" algn="ctr">
-              <a:lnSpc>
-                <a:spcPct val="250000"/>
-              </a:lnSpc>
-              <a:buNone/>
-            </a:pPr>
-            <a:r>
-              <a:rPr lang="hu-HU" sz="3600" noProof="1"/>
-              <a:t>Győr Norbert - 17 commit</a:t>
+              <a:t>Köszönjük a figyelmet!</a:t>
             </a:r>
           </a:p>
         </p:txBody>
@@ -3879,157 +4945,16 @@
     </p:spTree>
     <p:extLst>
       <p:ext uri="{BB962C8B-B14F-4D97-AF65-F5344CB8AC3E}">
-        <p14:creationId xmlns:p14="http://schemas.microsoft.com/office/powerpoint/2010/main" val="2026754947"/>
+        <p14:creationId xmlns:p14="http://schemas.microsoft.com/office/powerpoint/2010/main" val="3661286565"/>
       </p:ext>
     </p:extLst>
   </p:cSld>
   <p:clrMapOvr>
     <a:masterClrMapping/>
   </p:clrMapOvr>
-  <mc:AlternateContent xmlns:mc="http://schemas.openxmlformats.org/markup-compatibility/2006">
-    <mc:Choice xmlns:p159="http://schemas.microsoft.com/office/powerpoint/2015/09/main" Requires="p159">
-      <p:transition xmlns:p14="http://schemas.microsoft.com/office/powerpoint/2010/main" spd="slow" p14:dur="2000">
-        <p159:morph option="byObject"/>
-      </p:transition>
-    </mc:Choice>
-    <mc:Fallback>
-      <p:transition spd="slow">
-        <p:fade/>
-      </p:transition>
-    </mc:Fallback>
-  </mc:AlternateContent>
-</p:sld>
-</file>
-
-<file path=ppt/slides/slide4.xml><?xml version="1.0" encoding="utf-8"?>
-<p:sld xmlns:a="http://schemas.openxmlformats.org/drawingml/2006/main" xmlns:r="http://schemas.openxmlformats.org/officeDocument/2006/relationships" xmlns:p="http://schemas.openxmlformats.org/presentationml/2006/main">
-  <p:cSld>
-    <p:spTree>
-      <p:nvGrpSpPr>
-        <p:cNvPr id="1" name=""/>
-        <p:cNvGrpSpPr/>
-        <p:nvPr/>
-      </p:nvGrpSpPr>
-      <p:grpSpPr>
-        <a:xfrm>
-          <a:off x="0" y="0"/>
-          <a:ext cx="0" cy="0"/>
-          <a:chOff x="0" y="0"/>
-          <a:chExt cx="0" cy="0"/>
-        </a:xfrm>
-      </p:grpSpPr>
-      <p:sp>
-        <p:nvSpPr>
-          <p:cNvPr id="2" name="Cím 1">
-            <a:extLst>
-              <a:ext uri="{FF2B5EF4-FFF2-40B4-BE49-F238E27FC236}">
-                <a16:creationId xmlns:a16="http://schemas.microsoft.com/office/drawing/2014/main" id="{E87B8954-D85D-E39A-EF26-4D60F5B6F605}"/>
-              </a:ext>
-            </a:extLst>
-          </p:cNvPr>
-          <p:cNvSpPr>
-            <a:spLocks noGrp="1"/>
-          </p:cNvSpPr>
-          <p:nvPr>
-            <p:ph type="title"/>
-          </p:nvPr>
-        </p:nvSpPr>
-        <p:spPr/>
-        <p:txBody>
-          <a:bodyPr>
-            <a:normAutofit/>
-          </a:bodyPr>
-          <a:lstStyle/>
-          <a:p>
-            <a:pPr algn="ctr"/>
-            <a:r>
-              <a:rPr lang="hu-HU" sz="6000" b="1" dirty="0">
-                <a:latin typeface="+mn-lt"/>
-              </a:rPr>
-              <a:t>Használt nyelvek</a:t>
-            </a:r>
-          </a:p>
-        </p:txBody>
-      </p:sp>
-      <p:sp>
-        <p:nvSpPr>
-          <p:cNvPr id="3" name="Tartalom helye 2">
-            <a:extLst>
-              <a:ext uri="{FF2B5EF4-FFF2-40B4-BE49-F238E27FC236}">
-                <a16:creationId xmlns:a16="http://schemas.microsoft.com/office/drawing/2014/main" id="{151F0F97-A2C9-5822-1DD2-64F4C31910F8}"/>
-              </a:ext>
-            </a:extLst>
-          </p:cNvPr>
-          <p:cNvSpPr>
-            <a:spLocks noGrp="1"/>
-          </p:cNvSpPr>
-          <p:nvPr>
-            <p:ph idx="1"/>
-          </p:nvPr>
-        </p:nvSpPr>
-        <p:spPr/>
-        <p:txBody>
-          <a:bodyPr>
-            <a:normAutofit/>
-          </a:bodyPr>
-          <a:lstStyle/>
-          <a:p>
-            <a:pPr>
-              <a:lnSpc>
-                <a:spcPct val="250000"/>
-              </a:lnSpc>
-            </a:pPr>
-            <a:r>
-              <a:rPr lang="hu-HU" sz="3200" dirty="0"/>
-              <a:t>HTML 71.4%</a:t>
-            </a:r>
-          </a:p>
-          <a:p>
-            <a:pPr>
-              <a:lnSpc>
-                <a:spcPct val="250000"/>
-              </a:lnSpc>
-            </a:pPr>
-            <a:r>
-              <a:rPr lang="hu-HU" sz="3200" dirty="0"/>
-              <a:t>CSS 15.5%</a:t>
-            </a:r>
-          </a:p>
-          <a:p>
-            <a:pPr>
-              <a:lnSpc>
-                <a:spcPct val="250000"/>
-              </a:lnSpc>
-            </a:pPr>
-            <a:r>
-              <a:rPr lang="hu-HU" sz="3200" dirty="0"/>
-              <a:t>JavaScript 13.1%</a:t>
-            </a:r>
-          </a:p>
-        </p:txBody>
-      </p:sp>
-    </p:spTree>
-    <p:extLst>
-      <p:ext uri="{BB962C8B-B14F-4D97-AF65-F5344CB8AC3E}">
-        <p14:creationId xmlns:p14="http://schemas.microsoft.com/office/powerpoint/2010/main" val="704455751"/>
-      </p:ext>
-    </p:extLst>
-  </p:cSld>
-  <p:clrMapOvr>
-    <a:masterClrMapping/>
-  </p:clrMapOvr>
-  <mc:AlternateContent xmlns:mc="http://schemas.openxmlformats.org/markup-compatibility/2006">
-    <mc:Choice xmlns:p159="http://schemas.microsoft.com/office/powerpoint/2015/09/main" Requires="p159">
-      <p:transition xmlns:p14="http://schemas.microsoft.com/office/powerpoint/2010/main" spd="slow" p14:dur="2000">
-        <p159:morph option="byObject"/>
-      </p:transition>
-    </mc:Choice>
-    <mc:Fallback>
-      <p:transition spd="slow">
-        <p:fade/>
-      </p:transition>
-    </mc:Fallback>
-  </mc:AlternateContent>
+  <p:transition spd="slow">
+    <p:push dir="u"/>
+  </p:transition>
 </p:sld>
 </file>
 
@@ -4326,4 +5251,299 @@
     </a:ext>
   </a:extLst>
 </a:theme>
+</file>
+
+<file path=ppt/theme/theme2.xml><?xml version="1.0" encoding="utf-8"?>
+<a:theme xmlns:a="http://schemas.openxmlformats.org/drawingml/2006/main" name="Office-téma">
+  <a:themeElements>
+    <a:clrScheme name="Office">
+      <a:dk1>
+        <a:sysClr val="windowText" lastClr="000000"/>
+      </a:dk1>
+      <a:lt1>
+        <a:sysClr val="window" lastClr="FFFFFF"/>
+      </a:lt1>
+      <a:dk2>
+        <a:srgbClr val="44546A"/>
+      </a:dk2>
+      <a:lt2>
+        <a:srgbClr val="E7E6E6"/>
+      </a:lt2>
+      <a:accent1>
+        <a:srgbClr val="4472C4"/>
+      </a:accent1>
+      <a:accent2>
+        <a:srgbClr val="ED7D31"/>
+      </a:accent2>
+      <a:accent3>
+        <a:srgbClr val="A5A5A5"/>
+      </a:accent3>
+      <a:accent4>
+        <a:srgbClr val="FFC000"/>
+      </a:accent4>
+      <a:accent5>
+        <a:srgbClr val="5B9BD5"/>
+      </a:accent5>
+      <a:accent6>
+        <a:srgbClr val="70AD47"/>
+      </a:accent6>
+      <a:hlink>
+        <a:srgbClr val="0563C1"/>
+      </a:hlink>
+      <a:folHlink>
+        <a:srgbClr val="954F72"/>
+      </a:folHlink>
+    </a:clrScheme>
+    <a:fontScheme name="Office">
+      <a:majorFont>
+        <a:latin typeface="Calibri Light" panose="020F0302020204030204"/>
+        <a:ea typeface=""/>
+        <a:cs typeface=""/>
+        <a:font script="Jpan" typeface="游ゴシック Light"/>
+        <a:font script="Hang" typeface="맑은 고딕"/>
+        <a:font script="Hans" typeface="等线 Light"/>
+        <a:font script="Hant" typeface="新細明體"/>
+        <a:font script="Arab" typeface="Times New Roman"/>
+        <a:font script="Hebr" typeface="Times New Roman"/>
+        <a:font script="Thai" typeface="Angsana New"/>
+        <a:font script="Ethi" typeface="Nyala"/>
+        <a:font script="Beng" typeface="Vrinda"/>
+        <a:font script="Gujr" typeface="Shruti"/>
+        <a:font script="Khmr" typeface="MoolBoran"/>
+        <a:font script="Knda" typeface="Tunga"/>
+        <a:font script="Guru" typeface="Raavi"/>
+        <a:font script="Cans" typeface="Euphemia"/>
+        <a:font script="Cher" typeface="Plantagenet Cherokee"/>
+        <a:font script="Yiii" typeface="Microsoft Yi Baiti"/>
+        <a:font script="Tibt" typeface="Microsoft Himalaya"/>
+        <a:font script="Thaa" typeface="MV Boli"/>
+        <a:font script="Deva" typeface="Mangal"/>
+        <a:font script="Telu" typeface="Gautami"/>
+        <a:font script="Taml" typeface="Latha"/>
+        <a:font script="Syrc" typeface="Estrangelo Edessa"/>
+        <a:font script="Orya" typeface="Kalinga"/>
+        <a:font script="Mlym" typeface="Kartika"/>
+        <a:font script="Laoo" typeface="DokChampa"/>
+        <a:font script="Sinh" typeface="Iskoola Pota"/>
+        <a:font script="Mong" typeface="Mongolian Baiti"/>
+        <a:font script="Viet" typeface="Times New Roman"/>
+        <a:font script="Uigh" typeface="Microsoft Uighur"/>
+        <a:font script="Geor" typeface="Sylfaen"/>
+        <a:font script="Armn" typeface="Arial"/>
+        <a:font script="Bugi" typeface="Leelawadee UI"/>
+        <a:font script="Bopo" typeface="Microsoft JhengHei"/>
+        <a:font script="Java" typeface="Javanese Text"/>
+        <a:font script="Lisu" typeface="Segoe UI"/>
+        <a:font script="Mymr" typeface="Myanmar Text"/>
+        <a:font script="Nkoo" typeface="Ebrima"/>
+        <a:font script="Olck" typeface="Nirmala UI"/>
+        <a:font script="Osma" typeface="Ebrima"/>
+        <a:font script="Phag" typeface="Phagspa"/>
+        <a:font script="Syrn" typeface="Estrangelo Edessa"/>
+        <a:font script="Syrj" typeface="Estrangelo Edessa"/>
+        <a:font script="Syre" typeface="Estrangelo Edessa"/>
+        <a:font script="Sora" typeface="Nirmala UI"/>
+        <a:font script="Tale" typeface="Microsoft Tai Le"/>
+        <a:font script="Talu" typeface="Microsoft New Tai Lue"/>
+        <a:font script="Tfng" typeface="Ebrima"/>
+      </a:majorFont>
+      <a:minorFont>
+        <a:latin typeface="Calibri" panose="020F0502020204030204"/>
+        <a:ea typeface=""/>
+        <a:cs typeface=""/>
+        <a:font script="Jpan" typeface="游ゴシック"/>
+        <a:font script="Hang" typeface="맑은 고딕"/>
+        <a:font script="Hans" typeface="等线"/>
+        <a:font script="Hant" typeface="新細明體"/>
+        <a:font script="Arab" typeface="Arial"/>
+        <a:font script="Hebr" typeface="Arial"/>
+        <a:font script="Thai" typeface="Cordia New"/>
+        <a:font script="Ethi" typeface="Nyala"/>
+        <a:font script="Beng" typeface="Vrinda"/>
+        <a:font script="Gujr" typeface="Shruti"/>
+        <a:font script="Khmr" typeface="DaunPenh"/>
+        <a:font script="Knda" typeface="Tunga"/>
+        <a:font script="Guru" typeface="Raavi"/>
+        <a:font script="Cans" typeface="Euphemia"/>
+        <a:font script="Cher" typeface="Plantagenet Cherokee"/>
+        <a:font script="Yiii" typeface="Microsoft Yi Baiti"/>
+        <a:font script="Tibt" typeface="Microsoft Himalaya"/>
+        <a:font script="Thaa" typeface="MV Boli"/>
+        <a:font script="Deva" typeface="Mangal"/>
+        <a:font script="Telu" typeface="Gautami"/>
+        <a:font script="Taml" typeface="Latha"/>
+        <a:font script="Syrc" typeface="Estrangelo Edessa"/>
+        <a:font script="Orya" typeface="Kalinga"/>
+        <a:font script="Mlym" typeface="Kartika"/>
+        <a:font script="Laoo" typeface="DokChampa"/>
+        <a:font script="Sinh" typeface="Iskoola Pota"/>
+        <a:font script="Mong" typeface="Mongolian Baiti"/>
+        <a:font script="Viet" typeface="Arial"/>
+        <a:font script="Uigh" typeface="Microsoft Uighur"/>
+        <a:font script="Geor" typeface="Sylfaen"/>
+        <a:font script="Armn" typeface="Arial"/>
+        <a:font script="Bugi" typeface="Leelawadee UI"/>
+        <a:font script="Bopo" typeface="Microsoft JhengHei"/>
+        <a:font script="Java" typeface="Javanese Text"/>
+        <a:font script="Lisu" typeface="Segoe UI"/>
+        <a:font script="Mymr" typeface="Myanmar Text"/>
+        <a:font script="Nkoo" typeface="Ebrima"/>
+        <a:font script="Olck" typeface="Nirmala UI"/>
+        <a:font script="Osma" typeface="Ebrima"/>
+        <a:font script="Phag" typeface="Phagspa"/>
+        <a:font script="Syrn" typeface="Estrangelo Edessa"/>
+        <a:font script="Syrj" typeface="Estrangelo Edessa"/>
+        <a:font script="Syre" typeface="Estrangelo Edessa"/>
+        <a:font script="Sora" typeface="Nirmala UI"/>
+        <a:font script="Tale" typeface="Microsoft Tai Le"/>
+        <a:font script="Talu" typeface="Microsoft New Tai Lue"/>
+        <a:font script="Tfng" typeface="Ebrima"/>
+      </a:minorFont>
+    </a:fontScheme>
+    <a:fmtScheme name="Office">
+      <a:fillStyleLst>
+        <a:solidFill>
+          <a:schemeClr val="phClr"/>
+        </a:solidFill>
+        <a:gradFill rotWithShape="1">
+          <a:gsLst>
+            <a:gs pos="0">
+              <a:schemeClr val="phClr">
+                <a:lumMod val="110000"/>
+                <a:satMod val="105000"/>
+                <a:tint val="67000"/>
+              </a:schemeClr>
+            </a:gs>
+            <a:gs pos="50000">
+              <a:schemeClr val="phClr">
+                <a:lumMod val="105000"/>
+                <a:satMod val="103000"/>
+                <a:tint val="73000"/>
+              </a:schemeClr>
+            </a:gs>
+            <a:gs pos="100000">
+              <a:schemeClr val="phClr">
+                <a:lumMod val="105000"/>
+                <a:satMod val="109000"/>
+                <a:tint val="81000"/>
+              </a:schemeClr>
+            </a:gs>
+          </a:gsLst>
+          <a:lin ang="5400000" scaled="0"/>
+        </a:gradFill>
+        <a:gradFill rotWithShape="1">
+          <a:gsLst>
+            <a:gs pos="0">
+              <a:schemeClr val="phClr">
+                <a:satMod val="103000"/>
+                <a:lumMod val="102000"/>
+                <a:tint val="94000"/>
+              </a:schemeClr>
+            </a:gs>
+            <a:gs pos="50000">
+              <a:schemeClr val="phClr">
+                <a:satMod val="110000"/>
+                <a:lumMod val="100000"/>
+                <a:shade val="100000"/>
+              </a:schemeClr>
+            </a:gs>
+            <a:gs pos="100000">
+              <a:schemeClr val="phClr">
+                <a:lumMod val="99000"/>
+                <a:satMod val="120000"/>
+                <a:shade val="78000"/>
+              </a:schemeClr>
+            </a:gs>
+          </a:gsLst>
+          <a:lin ang="5400000" scaled="0"/>
+        </a:gradFill>
+      </a:fillStyleLst>
+      <a:lnStyleLst>
+        <a:ln w="6350" cap="flat" cmpd="sng" algn="ctr">
+          <a:solidFill>
+            <a:schemeClr val="phClr"/>
+          </a:solidFill>
+          <a:prstDash val="solid"/>
+          <a:miter lim="800000"/>
+        </a:ln>
+        <a:ln w="12700" cap="flat" cmpd="sng" algn="ctr">
+          <a:solidFill>
+            <a:schemeClr val="phClr"/>
+          </a:solidFill>
+          <a:prstDash val="solid"/>
+          <a:miter lim="800000"/>
+        </a:ln>
+        <a:ln w="19050" cap="flat" cmpd="sng" algn="ctr">
+          <a:solidFill>
+            <a:schemeClr val="phClr"/>
+          </a:solidFill>
+          <a:prstDash val="solid"/>
+          <a:miter lim="800000"/>
+        </a:ln>
+      </a:lnStyleLst>
+      <a:effectStyleLst>
+        <a:effectStyle>
+          <a:effectLst/>
+        </a:effectStyle>
+        <a:effectStyle>
+          <a:effectLst/>
+        </a:effectStyle>
+        <a:effectStyle>
+          <a:effectLst>
+            <a:outerShdw blurRad="57150" dist="19050" dir="5400000" algn="ctr" rotWithShape="0">
+              <a:srgbClr val="000000">
+                <a:alpha val="63000"/>
+              </a:srgbClr>
+            </a:outerShdw>
+          </a:effectLst>
+        </a:effectStyle>
+      </a:effectStyleLst>
+      <a:bgFillStyleLst>
+        <a:solidFill>
+          <a:schemeClr val="phClr"/>
+        </a:solidFill>
+        <a:solidFill>
+          <a:schemeClr val="phClr">
+            <a:tint val="95000"/>
+            <a:satMod val="170000"/>
+          </a:schemeClr>
+        </a:solidFill>
+        <a:gradFill rotWithShape="1">
+          <a:gsLst>
+            <a:gs pos="0">
+              <a:schemeClr val="phClr">
+                <a:tint val="93000"/>
+                <a:satMod val="150000"/>
+                <a:shade val="98000"/>
+                <a:lumMod val="102000"/>
+              </a:schemeClr>
+            </a:gs>
+            <a:gs pos="50000">
+              <a:schemeClr val="phClr">
+                <a:tint val="98000"/>
+                <a:satMod val="130000"/>
+                <a:shade val="90000"/>
+                <a:lumMod val="103000"/>
+              </a:schemeClr>
+            </a:gs>
+            <a:gs pos="100000">
+              <a:schemeClr val="phClr">
+                <a:shade val="63000"/>
+                <a:satMod val="120000"/>
+              </a:schemeClr>
+            </a:gs>
+          </a:gsLst>
+          <a:lin ang="5400000" scaled="0"/>
+        </a:gradFill>
+      </a:bgFillStyleLst>
+    </a:fmtScheme>
+  </a:themeElements>
+  <a:objectDefaults/>
+  <a:extraClrSchemeLst/>
+  <a:extLst>
+    <a:ext uri="{05A4C25C-085E-4340-85A3-A5531E510DB2}">
+      <thm15:themeFamily xmlns:thm15="http://schemas.microsoft.com/office/thememl/2012/main" name="Office Theme" id="{62F939B6-93AF-4DB8-9C6B-D6C7DFDC589F}" vid="{4A3C46E8-61CC-4603-A589-7422A47A8E4A}"/>
+    </a:ext>
+  </a:extLst>
+</a:theme>
 </file>
--- a/Dwayne Johnson.pptx
+++ b/Dwayne Johnson.pptx
@@ -12,7 +12,7 @@
     <p:sldId id="260" r:id="rId3"/>
     <p:sldId id="261" r:id="rId4"/>
     <p:sldId id="262" r:id="rId5"/>
-    <p:sldId id="264" r:id="rId6"/>
+    <p:sldId id="265" r:id="rId6"/>
     <p:sldId id="263" r:id="rId7"/>
   </p:sldIdLst>
   <p:sldSz cx="12192000" cy="6858000"/>
@@ -202,7 +202,7 @@
           <a:p>
             <a:fld id="{24EAA58A-53C5-4BF1-8D06-9E1B638EAAB5}" type="datetimeFigureOut">
               <a:rPr lang="hu-HU" smtClean="0"/>
-              <a:t>2025. 02. 17.</a:t>
+              <a:t>2025.02.19</a:t>
             </a:fld>
             <a:endParaRPr lang="hu-HU"/>
           </a:p>
@@ -616,7 +616,7 @@
           <a:p>
             <a:fld id="{27C52E7B-312F-4F68-B050-DB38E8C31169}" type="datetimeFigureOut">
               <a:rPr lang="hu-HU" smtClean="0"/>
-              <a:t>2025. 02. 17.</a:t>
+              <a:t>2025.02.19</a:t>
             </a:fld>
             <a:endParaRPr lang="hu-HU"/>
           </a:p>
@@ -826,7 +826,7 @@
           <a:p>
             <a:fld id="{27C52E7B-312F-4F68-B050-DB38E8C31169}" type="datetimeFigureOut">
               <a:rPr lang="hu-HU" smtClean="0"/>
-              <a:t>2025. 02. 17.</a:t>
+              <a:t>2025.02.19</a:t>
             </a:fld>
             <a:endParaRPr lang="hu-HU"/>
           </a:p>
@@ -1046,7 +1046,7 @@
           <a:p>
             <a:fld id="{27C52E7B-312F-4F68-B050-DB38E8C31169}" type="datetimeFigureOut">
               <a:rPr lang="hu-HU" smtClean="0"/>
-              <a:t>2025. 02. 17.</a:t>
+              <a:t>2025.02.19</a:t>
             </a:fld>
             <a:endParaRPr lang="hu-HU"/>
           </a:p>
@@ -1256,7 +1256,7 @@
           <a:p>
             <a:fld id="{27C52E7B-312F-4F68-B050-DB38E8C31169}" type="datetimeFigureOut">
               <a:rPr lang="hu-HU" smtClean="0"/>
-              <a:t>2025. 02. 17.</a:t>
+              <a:t>2025.02.19</a:t>
             </a:fld>
             <a:endParaRPr lang="hu-HU"/>
           </a:p>
@@ -1543,7 +1543,7 @@
           <a:p>
             <a:fld id="{27C52E7B-312F-4F68-B050-DB38E8C31169}" type="datetimeFigureOut">
               <a:rPr lang="hu-HU" smtClean="0"/>
-              <a:t>2025. 02. 17.</a:t>
+              <a:t>2025.02.19</a:t>
             </a:fld>
             <a:endParaRPr lang="hu-HU"/>
           </a:p>
@@ -1820,7 +1820,7 @@
           <a:p>
             <a:fld id="{27C52E7B-312F-4F68-B050-DB38E8C31169}" type="datetimeFigureOut">
               <a:rPr lang="hu-HU" smtClean="0"/>
-              <a:t>2025. 02. 17.</a:t>
+              <a:t>2025.02.19</a:t>
             </a:fld>
             <a:endParaRPr lang="hu-HU"/>
           </a:p>
@@ -2244,7 +2244,7 @@
           <a:p>
             <a:fld id="{27C52E7B-312F-4F68-B050-DB38E8C31169}" type="datetimeFigureOut">
               <a:rPr lang="hu-HU" smtClean="0"/>
-              <a:t>2025. 02. 17.</a:t>
+              <a:t>2025.02.19</a:t>
             </a:fld>
             <a:endParaRPr lang="hu-HU"/>
           </a:p>
@@ -2397,7 +2397,7 @@
           <a:p>
             <a:fld id="{27C52E7B-312F-4F68-B050-DB38E8C31169}" type="datetimeFigureOut">
               <a:rPr lang="hu-HU" smtClean="0"/>
-              <a:t>2025. 02. 17.</a:t>
+              <a:t>2025.02.19</a:t>
             </a:fld>
             <a:endParaRPr lang="hu-HU"/>
           </a:p>
@@ -2522,7 +2522,7 @@
           <a:p>
             <a:fld id="{27C52E7B-312F-4F68-B050-DB38E8C31169}" type="datetimeFigureOut">
               <a:rPr lang="hu-HU" smtClean="0"/>
-              <a:t>2025. 02. 17.</a:t>
+              <a:t>2025.02.19</a:t>
             </a:fld>
             <a:endParaRPr lang="hu-HU"/>
           </a:p>
@@ -2845,7 +2845,7 @@
           <a:p>
             <a:fld id="{27C52E7B-312F-4F68-B050-DB38E8C31169}" type="datetimeFigureOut">
               <a:rPr lang="hu-HU" smtClean="0"/>
-              <a:t>2025. 02. 17.</a:t>
+              <a:t>2025.02.19</a:t>
             </a:fld>
             <a:endParaRPr lang="hu-HU"/>
           </a:p>
@@ -3145,7 +3145,7 @@
           <a:p>
             <a:fld id="{27C52E7B-312F-4F68-B050-DB38E8C31169}" type="datetimeFigureOut">
               <a:rPr lang="hu-HU" smtClean="0"/>
-              <a:t>2025. 02. 17.</a:t>
+              <a:t>2025.02.19</a:t>
             </a:fld>
             <a:endParaRPr lang="hu-HU"/>
           </a:p>
@@ -3398,7 +3398,7 @@
           <a:p>
             <a:fld id="{27C52E7B-312F-4F68-B050-DB38E8C31169}" type="datetimeFigureOut">
               <a:rPr lang="hu-HU" smtClean="0"/>
-              <a:t>2025. 02. 17.</a:t>
+              <a:t>2025.02.19</a:t>
             </a:fld>
             <a:endParaRPr lang="hu-HU"/>
           </a:p>
@@ -4721,7 +4721,13 @@
   <p:cSld>
     <p:spTree>
       <p:nvGrpSpPr>
-        <p:cNvPr id="1" name=""/>
+        <p:cNvPr id="1" name="">
+          <a:extLst>
+            <a:ext uri="{FF2B5EF4-FFF2-40B4-BE49-F238E27FC236}">
+              <a16:creationId xmlns:a16="http://schemas.microsoft.com/office/drawing/2014/main" id="{8D03EFEC-925F-C8A7-AEAB-0E1AB2B4ABBE}"/>
+            </a:ext>
+          </a:extLst>
+        </p:cNvPr>
         <p:cNvGrpSpPr/>
         <p:nvPr/>
       </p:nvGrpSpPr>
@@ -4735,18 +4741,18 @@
       </p:grpSpPr>
       <p:sp>
         <p:nvSpPr>
-          <p:cNvPr id="2" name="Cím 1">
-            <a:extLst>
-              <a:ext uri="{FF2B5EF4-FFF2-40B4-BE49-F238E27FC236}">
-                <a16:creationId xmlns:a16="http://schemas.microsoft.com/office/drawing/2014/main" id="{41F2EE23-0876-D30E-6AC7-12AE89683983}"/>
-              </a:ext>
-            </a:extLst>
-          </p:cNvPr>
-          <p:cNvSpPr>
-            <a:spLocks noGrp="1"/>
-          </p:cNvSpPr>
-          <p:nvPr>
-            <p:ph type="ctrTitle"/>
+          <p:cNvPr id="3" name="Alcím 2">
+            <a:extLst>
+              <a:ext uri="{FF2B5EF4-FFF2-40B4-BE49-F238E27FC236}">
+                <a16:creationId xmlns:a16="http://schemas.microsoft.com/office/drawing/2014/main" id="{CFFA206B-27AB-6FCA-497F-E00EB5306AA3}"/>
+              </a:ext>
+            </a:extLst>
+          </p:cNvPr>
+          <p:cNvSpPr>
+            <a:spLocks noGrp="1"/>
+          </p:cNvSpPr>
+          <p:nvPr>
+            <p:ph type="subTitle" idx="1"/>
           </p:nvPr>
         </p:nvSpPr>
         <p:spPr/>
@@ -4758,35 +4764,176 @@
           </a:p>
         </p:txBody>
       </p:sp>
-      <p:sp>
-        <p:nvSpPr>
-          <p:cNvPr id="3" name="Alcím 2">
-            <a:extLst>
-              <a:ext uri="{FF2B5EF4-FFF2-40B4-BE49-F238E27FC236}">
-                <a16:creationId xmlns:a16="http://schemas.microsoft.com/office/drawing/2014/main" id="{92F4B834-72AC-5ADE-8E72-A7F9CA15F207}"/>
-              </a:ext>
-            </a:extLst>
-          </p:cNvPr>
-          <p:cNvSpPr>
-            <a:spLocks noGrp="1"/>
-          </p:cNvSpPr>
-          <p:nvPr>
-            <p:ph type="subTitle" idx="1"/>
-          </p:nvPr>
-        </p:nvSpPr>
-        <p:spPr/>
-        <p:txBody>
-          <a:bodyPr/>
-          <a:lstStyle/>
-          <a:p>
-            <a:endParaRPr lang="hu-HU"/>
+      <p:pic>
+        <p:nvPicPr>
+          <p:cNvPr id="5" name="Kép 4">
+            <a:extLst>
+              <a:ext uri="{FF2B5EF4-FFF2-40B4-BE49-F238E27FC236}">
+                <a16:creationId xmlns:a16="http://schemas.microsoft.com/office/drawing/2014/main" id="{DA31DD95-5685-0203-9A29-98FDA4311C64}"/>
+              </a:ext>
+            </a:extLst>
+          </p:cNvPr>
+          <p:cNvPicPr>
+            <a:picLocks noChangeAspect="1"/>
+          </p:cNvPicPr>
+          <p:nvPr/>
+        </p:nvPicPr>
+        <p:blipFill>
+          <a:blip r:embed="rId2">
+            <a:extLst>
+              <a:ext uri="{28A0092B-C50C-407E-A947-70E740481C1C}">
+                <a14:useLocalDpi xmlns:a14="http://schemas.microsoft.com/office/drawing/2010/main" val="0"/>
+              </a:ext>
+            </a:extLst>
+          </a:blip>
+          <a:stretch>
+            <a:fillRect/>
+          </a:stretch>
+        </p:blipFill>
+        <p:spPr>
+          <a:xfrm>
+            <a:off x="-183108" y="-39945"/>
+            <a:ext cx="12558216" cy="6897944"/>
+          </a:xfrm>
+          <a:prstGeom prst="rect">
+            <a:avLst/>
+          </a:prstGeom>
+        </p:spPr>
+      </p:pic>
+      <p:sp>
+        <p:nvSpPr>
+          <p:cNvPr id="10" name="Cím 1">
+            <a:extLst>
+              <a:ext uri="{FF2B5EF4-FFF2-40B4-BE49-F238E27FC236}">
+                <a16:creationId xmlns:a16="http://schemas.microsoft.com/office/drawing/2014/main" id="{08825203-F4FB-1765-0DA8-A7DB75514F57}"/>
+              </a:ext>
+            </a:extLst>
+          </p:cNvPr>
+          <p:cNvSpPr txBox="1">
+            <a:spLocks/>
+          </p:cNvSpPr>
+          <p:nvPr/>
+        </p:nvSpPr>
+        <p:spPr>
+          <a:xfrm>
+            <a:off x="2514600" y="2121408"/>
+            <a:ext cx="10515601" cy="1312672"/>
+          </a:xfrm>
+          <a:prstGeom prst="rect">
+            <a:avLst/>
+          </a:prstGeom>
+        </p:spPr>
+        <p:txBody>
+          <a:bodyPr vert="horz" lIns="91440" tIns="45720" rIns="91440" bIns="45720" rtlCol="0" anchor="b">
+            <a:normAutofit/>
+          </a:bodyPr>
+          <a:lstStyle>
+            <a:lvl1pPr algn="ctr" defTabSz="914400" rtl="0" eaLnBrk="1" latinLnBrk="0" hangingPunct="1">
+              <a:lnSpc>
+                <a:spcPct val="90000"/>
+              </a:lnSpc>
+              <a:spcBef>
+                <a:spcPct val="0"/>
+              </a:spcBef>
+              <a:buNone/>
+              <a:defRPr sz="6000" kern="1200">
+                <a:solidFill>
+                  <a:schemeClr val="tx1"/>
+                </a:solidFill>
+                <a:latin typeface="+mj-lt"/>
+                <a:ea typeface="+mj-ea"/>
+                <a:cs typeface="+mj-cs"/>
+              </a:defRPr>
+            </a:lvl1pPr>
+          </a:lstStyle>
+          <a:p>
+            <a:endParaRPr lang="hu-HU" sz="6600" b="1" dirty="0">
+              <a:latin typeface="+mn-lt"/>
+            </a:endParaRPr>
+          </a:p>
+        </p:txBody>
+      </p:sp>
+      <p:pic>
+        <p:nvPicPr>
+          <p:cNvPr id="6" name="Kép 5">
+            <a:extLst>
+              <a:ext uri="{FF2B5EF4-FFF2-40B4-BE49-F238E27FC236}">
+                <a16:creationId xmlns:a16="http://schemas.microsoft.com/office/drawing/2014/main" id="{9C130867-F16D-4AC2-BE60-FA011B9356AB}"/>
+              </a:ext>
+            </a:extLst>
+          </p:cNvPr>
+          <p:cNvPicPr>
+            <a:picLocks noChangeAspect="1"/>
+          </p:cNvPicPr>
+          <p:nvPr/>
+        </p:nvPicPr>
+        <p:blipFill>
+          <a:blip r:embed="rId3"/>
+          <a:stretch>
+            <a:fillRect/>
+          </a:stretch>
+        </p:blipFill>
+        <p:spPr>
+          <a:xfrm>
+            <a:off x="6096000" y="1078510"/>
+            <a:ext cx="5710170" cy="5463510"/>
+          </a:xfrm>
+          <a:prstGeom prst="rect">
+            <a:avLst/>
+          </a:prstGeom>
+        </p:spPr>
+      </p:pic>
+      <p:sp>
+        <p:nvSpPr>
+          <p:cNvPr id="2" name="Szövegdoboz 1">
+            <a:extLst>
+              <a:ext uri="{FF2B5EF4-FFF2-40B4-BE49-F238E27FC236}">
+                <a16:creationId xmlns:a16="http://schemas.microsoft.com/office/drawing/2014/main" id="{D1F17764-F5A1-49DF-8F5A-99E576DB44C0}"/>
+              </a:ext>
+            </a:extLst>
+          </p:cNvPr>
+          <p:cNvSpPr txBox="1"/>
+          <p:nvPr/>
+        </p:nvSpPr>
+        <p:spPr>
+          <a:xfrm>
+            <a:off x="6293293" y="62847"/>
+            <a:ext cx="5546773" cy="1015663"/>
+          </a:xfrm>
+          <a:prstGeom prst="rect">
+            <a:avLst/>
+          </a:prstGeom>
+          <a:noFill/>
+        </p:spPr>
+        <p:txBody>
+          <a:bodyPr wrap="square" rtlCol="0">
+            <a:spAutoFit/>
+          </a:bodyPr>
+          <a:lstStyle/>
+          <a:p>
+            <a:r>
+              <a:rPr lang="hu-HU" sz="6000" dirty="0" err="1">
+                <a:solidFill>
+                  <a:schemeClr val="bg1"/>
+                </a:solidFill>
+              </a:rPr>
+              <a:t>Github</a:t>
+            </a:r>
+            <a:r>
+              <a:rPr lang="hu-HU" sz="6000" dirty="0">
+                <a:solidFill>
+                  <a:schemeClr val="bg1"/>
+                </a:solidFill>
+              </a:rPr>
+              <a:t> Adatok</a:t>
+            </a:r>
           </a:p>
         </p:txBody>
       </p:sp>
     </p:spTree>
     <p:extLst>
       <p:ext uri="{BB962C8B-B14F-4D97-AF65-F5344CB8AC3E}">
-        <p14:creationId xmlns:p14="http://schemas.microsoft.com/office/powerpoint/2010/main" val="2041281869"/>
+        <p14:creationId xmlns:p14="http://schemas.microsoft.com/office/powerpoint/2010/main" val="185385761"/>
       </p:ext>
     </p:extLst>
   </p:cSld>

--- a/Dwayne Johnson.pptx
+++ b/Dwayne Johnson.pptx
@@ -5,15 +5,14 @@
     <p:sldMasterId id="2147483648" r:id="rId1"/>
   </p:sldMasterIdLst>
   <p:notesMasterIdLst>
-    <p:notesMasterId r:id="rId8"/>
+    <p:notesMasterId r:id="rId7"/>
   </p:notesMasterIdLst>
   <p:sldIdLst>
     <p:sldId id="256" r:id="rId2"/>
     <p:sldId id="260" r:id="rId3"/>
     <p:sldId id="261" r:id="rId4"/>
     <p:sldId id="262" r:id="rId5"/>
-    <p:sldId id="264" r:id="rId6"/>
-    <p:sldId id="263" r:id="rId7"/>
+    <p:sldId id="263" r:id="rId6"/>
   </p:sldIdLst>
   <p:sldSz cx="12192000" cy="6858000"/>
   <p:notesSz cx="6858000" cy="9144000"/>
@@ -202,7 +201,7 @@
           <a:p>
             <a:fld id="{24EAA58A-53C5-4BF1-8D06-9E1B638EAAB5}" type="datetimeFigureOut">
               <a:rPr lang="hu-HU" smtClean="0"/>
-              <a:t>2025. 02. 17.</a:t>
+              <a:t>2025.02.19</a:t>
             </a:fld>
             <a:endParaRPr lang="hu-HU"/>
           </a:p>
@@ -616,7 +615,7 @@
           <a:p>
             <a:fld id="{27C52E7B-312F-4F68-B050-DB38E8C31169}" type="datetimeFigureOut">
               <a:rPr lang="hu-HU" smtClean="0"/>
-              <a:t>2025. 02. 17.</a:t>
+              <a:t>2025.02.19</a:t>
             </a:fld>
             <a:endParaRPr lang="hu-HU"/>
           </a:p>
@@ -826,7 +825,7 @@
           <a:p>
             <a:fld id="{27C52E7B-312F-4F68-B050-DB38E8C31169}" type="datetimeFigureOut">
               <a:rPr lang="hu-HU" smtClean="0"/>
-              <a:t>2025. 02. 17.</a:t>
+              <a:t>2025.02.19</a:t>
             </a:fld>
             <a:endParaRPr lang="hu-HU"/>
           </a:p>
@@ -1046,7 +1045,7 @@
           <a:p>
             <a:fld id="{27C52E7B-312F-4F68-B050-DB38E8C31169}" type="datetimeFigureOut">
               <a:rPr lang="hu-HU" smtClean="0"/>
-              <a:t>2025. 02. 17.</a:t>
+              <a:t>2025.02.19</a:t>
             </a:fld>
             <a:endParaRPr lang="hu-HU"/>
           </a:p>
@@ -1256,7 +1255,7 @@
           <a:p>
             <a:fld id="{27C52E7B-312F-4F68-B050-DB38E8C31169}" type="datetimeFigureOut">
               <a:rPr lang="hu-HU" smtClean="0"/>
-              <a:t>2025. 02. 17.</a:t>
+              <a:t>2025.02.19</a:t>
             </a:fld>
             <a:endParaRPr lang="hu-HU"/>
           </a:p>
@@ -1543,7 +1542,7 @@
           <a:p>
             <a:fld id="{27C52E7B-312F-4F68-B050-DB38E8C31169}" type="datetimeFigureOut">
               <a:rPr lang="hu-HU" smtClean="0"/>
-              <a:t>2025. 02. 17.</a:t>
+              <a:t>2025.02.19</a:t>
             </a:fld>
             <a:endParaRPr lang="hu-HU"/>
           </a:p>
@@ -1820,7 +1819,7 @@
           <a:p>
             <a:fld id="{27C52E7B-312F-4F68-B050-DB38E8C31169}" type="datetimeFigureOut">
               <a:rPr lang="hu-HU" smtClean="0"/>
-              <a:t>2025. 02. 17.</a:t>
+              <a:t>2025.02.19</a:t>
             </a:fld>
             <a:endParaRPr lang="hu-HU"/>
           </a:p>
@@ -2244,7 +2243,7 @@
           <a:p>
             <a:fld id="{27C52E7B-312F-4F68-B050-DB38E8C31169}" type="datetimeFigureOut">
               <a:rPr lang="hu-HU" smtClean="0"/>
-              <a:t>2025. 02. 17.</a:t>
+              <a:t>2025.02.19</a:t>
             </a:fld>
             <a:endParaRPr lang="hu-HU"/>
           </a:p>
@@ -2397,7 +2396,7 @@
           <a:p>
             <a:fld id="{27C52E7B-312F-4F68-B050-DB38E8C31169}" type="datetimeFigureOut">
               <a:rPr lang="hu-HU" smtClean="0"/>
-              <a:t>2025. 02. 17.</a:t>
+              <a:t>2025.02.19</a:t>
             </a:fld>
             <a:endParaRPr lang="hu-HU"/>
           </a:p>
@@ -2522,7 +2521,7 @@
           <a:p>
             <a:fld id="{27C52E7B-312F-4F68-B050-DB38E8C31169}" type="datetimeFigureOut">
               <a:rPr lang="hu-HU" smtClean="0"/>
-              <a:t>2025. 02. 17.</a:t>
+              <a:t>2025.02.19</a:t>
             </a:fld>
             <a:endParaRPr lang="hu-HU"/>
           </a:p>
@@ -2845,7 +2844,7 @@
           <a:p>
             <a:fld id="{27C52E7B-312F-4F68-B050-DB38E8C31169}" type="datetimeFigureOut">
               <a:rPr lang="hu-HU" smtClean="0"/>
-              <a:t>2025. 02. 17.</a:t>
+              <a:t>2025.02.19</a:t>
             </a:fld>
             <a:endParaRPr lang="hu-HU"/>
           </a:p>
@@ -3145,7 +3144,7 @@
           <a:p>
             <a:fld id="{27C52E7B-312F-4F68-B050-DB38E8C31169}" type="datetimeFigureOut">
               <a:rPr lang="hu-HU" smtClean="0"/>
-              <a:t>2025. 02. 17.</a:t>
+              <a:t>2025.02.19</a:t>
             </a:fld>
             <a:endParaRPr lang="hu-HU"/>
           </a:p>
@@ -3398,7 +3397,7 @@
           <a:p>
             <a:fld id="{27C52E7B-312F-4F68-B050-DB38E8C31169}" type="datetimeFigureOut">
               <a:rPr lang="hu-HU" smtClean="0"/>
-              <a:t>2025. 02. 17.</a:t>
+              <a:t>2025.02.19</a:t>
             </a:fld>
             <a:endParaRPr lang="hu-HU"/>
           </a:p>
@@ -4076,80 +4075,21 @@
       </p:pic>
       <p:sp>
         <p:nvSpPr>
-          <p:cNvPr id="7" name="Szövegdoboz 6">
-            <a:extLst>
-              <a:ext uri="{FF2B5EF4-FFF2-40B4-BE49-F238E27FC236}">
-                <a16:creationId xmlns:a16="http://schemas.microsoft.com/office/drawing/2014/main" id="{DE92A26A-67A3-FC14-3696-48F8A8DD9F5D}"/>
-              </a:ext>
-            </a:extLst>
-          </p:cNvPr>
-          <p:cNvSpPr txBox="1"/>
+          <p:cNvPr id="10" name="Cím 1">
+            <a:extLst>
+              <a:ext uri="{FF2B5EF4-FFF2-40B4-BE49-F238E27FC236}">
+                <a16:creationId xmlns:a16="http://schemas.microsoft.com/office/drawing/2014/main" id="{497A4F74-8C79-F380-4966-C2321F66BD30}"/>
+              </a:ext>
+            </a:extLst>
+          </p:cNvPr>
+          <p:cNvSpPr txBox="1">
+            <a:spLocks/>
+          </p:cNvSpPr>
           <p:nvPr/>
         </p:nvSpPr>
         <p:spPr>
           <a:xfrm>
-            <a:off x="4842843" y="5188168"/>
-            <a:ext cx="6207760" cy="646331"/>
-          </a:xfrm>
-          <a:prstGeom prst="rect">
-            <a:avLst/>
-          </a:prstGeom>
-          <a:noFill/>
-        </p:spPr>
-        <p:txBody>
-          <a:bodyPr wrap="square">
-            <a:spAutoFit/>
-          </a:bodyPr>
-          <a:lstStyle/>
-          <a:p>
-            <a:pPr marL="0" indent="0" algn="ctr">
-              <a:buNone/>
-            </a:pPr>
-            <a:r>
-              <a:rPr lang="hu-HU" spc="300" dirty="0">
-                <a:solidFill>
-                  <a:schemeClr val="bg1"/>
-                </a:solidFill>
-              </a:rPr>
-              <a:t>A weboldalunk </a:t>
-            </a:r>
-            <a:r>
-              <a:rPr lang="hu-HU" spc="300" dirty="0" err="1">
-                <a:solidFill>
-                  <a:schemeClr val="bg1"/>
-                </a:solidFill>
-              </a:rPr>
-              <a:t>Dwayne</a:t>
-            </a:r>
-            <a:r>
-              <a:rPr lang="hu-HU" spc="300" dirty="0">
-                <a:solidFill>
-                  <a:schemeClr val="bg1"/>
-                </a:solidFill>
-              </a:rPr>
-              <a:t> Johnson életéről, családjáról és karrierjéről szól</a:t>
-            </a:r>
-            <a:endParaRPr lang="hu-HU" spc="300" dirty="0"/>
-          </a:p>
-        </p:txBody>
-      </p:sp>
-      <p:sp>
-        <p:nvSpPr>
-          <p:cNvPr id="10" name="Cím 1">
-            <a:extLst>
-              <a:ext uri="{FF2B5EF4-FFF2-40B4-BE49-F238E27FC236}">
-                <a16:creationId xmlns:a16="http://schemas.microsoft.com/office/drawing/2014/main" id="{497A4F74-8C79-F380-4966-C2321F66BD30}"/>
-              </a:ext>
-            </a:extLst>
-          </p:cNvPr>
-          <p:cNvSpPr txBox="1">
-            <a:spLocks/>
-          </p:cNvSpPr>
-          <p:nvPr/>
-        </p:nvSpPr>
-        <p:spPr>
-          <a:xfrm>
-            <a:off x="4384038" y="586168"/>
+            <a:off x="2455650" y="131399"/>
             <a:ext cx="10515601" cy="1312672"/>
           </a:xfrm>
           <a:prstGeom prst="rect">
@@ -4192,6 +4132,117 @@
             <a:endParaRPr lang="hu-HU" sz="6600" b="1" dirty="0">
               <a:latin typeface="+mn-lt"/>
             </a:endParaRPr>
+          </a:p>
+        </p:txBody>
+      </p:sp>
+      <p:sp>
+        <p:nvSpPr>
+          <p:cNvPr id="6" name="Téglalap 5">
+            <a:extLst>
+              <a:ext uri="{FF2B5EF4-FFF2-40B4-BE49-F238E27FC236}">
+                <a16:creationId xmlns:a16="http://schemas.microsoft.com/office/drawing/2014/main" id="{493A93D0-DEAF-437E-A550-27EE8D84F6B9}"/>
+              </a:ext>
+            </a:extLst>
+          </p:cNvPr>
+          <p:cNvSpPr/>
+          <p:nvPr/>
+        </p:nvSpPr>
+        <p:spPr>
+          <a:xfrm>
+            <a:off x="5055179" y="3147269"/>
+            <a:ext cx="4644427" cy="1828800"/>
+          </a:xfrm>
+          <a:prstGeom prst="rect">
+            <a:avLst/>
+          </a:prstGeom>
+          <a:solidFill>
+            <a:schemeClr val="tx1"/>
+          </a:solidFill>
+          <a:ln>
+            <a:noFill/>
+          </a:ln>
+        </p:spPr>
+        <p:style>
+          <a:lnRef idx="2">
+            <a:schemeClr val="accent1">
+              <a:shade val="50000"/>
+            </a:schemeClr>
+          </a:lnRef>
+          <a:fillRef idx="1">
+            <a:schemeClr val="accent1"/>
+          </a:fillRef>
+          <a:effectRef idx="0">
+            <a:schemeClr val="accent1"/>
+          </a:effectRef>
+          <a:fontRef idx="minor">
+            <a:schemeClr val="lt1"/>
+          </a:fontRef>
+        </p:style>
+        <p:txBody>
+          <a:bodyPr rtlCol="0" anchor="ctr"/>
+          <a:lstStyle/>
+          <a:p>
+            <a:pPr algn="ctr"/>
+            <a:endParaRPr lang="hu-HU" dirty="0"/>
+          </a:p>
+        </p:txBody>
+      </p:sp>
+      <p:sp>
+        <p:nvSpPr>
+          <p:cNvPr id="7" name="Szövegdoboz 6">
+            <a:extLst>
+              <a:ext uri="{FF2B5EF4-FFF2-40B4-BE49-F238E27FC236}">
+                <a16:creationId xmlns:a16="http://schemas.microsoft.com/office/drawing/2014/main" id="{DE92A26A-67A3-FC14-3696-48F8A8DD9F5D}"/>
+              </a:ext>
+            </a:extLst>
+          </p:cNvPr>
+          <p:cNvSpPr txBox="1"/>
+          <p:nvPr/>
+        </p:nvSpPr>
+        <p:spPr>
+          <a:xfrm>
+            <a:off x="4762944" y="2847841"/>
+            <a:ext cx="6207760" cy="1569660"/>
+          </a:xfrm>
+          <a:prstGeom prst="rect">
+            <a:avLst/>
+          </a:prstGeom>
+          <a:noFill/>
+        </p:spPr>
+        <p:txBody>
+          <a:bodyPr wrap="square">
+            <a:spAutoFit/>
+          </a:bodyPr>
+          <a:lstStyle/>
+          <a:p>
+            <a:pPr marL="0" indent="0" algn="ctr">
+              <a:buNone/>
+            </a:pPr>
+            <a:r>
+              <a:rPr lang="hu-HU" sz="3200" spc="300" dirty="0">
+                <a:solidFill>
+                  <a:schemeClr val="bg1"/>
+                </a:solidFill>
+              </a:rPr>
+              <a:t>A weboldalunk </a:t>
+            </a:r>
+            <a:r>
+              <a:rPr lang="hu-HU" sz="3200" spc="300" dirty="0" err="1">
+                <a:solidFill>
+                  <a:schemeClr val="bg1"/>
+                </a:solidFill>
+              </a:rPr>
+              <a:t>Dwayne</a:t>
+            </a:r>
+            <a:r>
+              <a:rPr lang="hu-HU" sz="3200" spc="300" dirty="0">
+                <a:solidFill>
+                  <a:schemeClr val="bg1"/>
+                </a:solidFill>
+              </a:rPr>
+              <a:t> Johnson életéről, családjáról és karrierjéről szól</a:t>
+            </a:r>
+            <a:endParaRPr lang="hu-HU" sz="3200" spc="300" dirty="0"/>
           </a:p>
         </p:txBody>
       </p:sp>
@@ -4297,128 +4348,21 @@
       </p:pic>
       <p:sp>
         <p:nvSpPr>
-          <p:cNvPr id="7" name="Szövegdoboz 6">
-            <a:extLst>
-              <a:ext uri="{FF2B5EF4-FFF2-40B4-BE49-F238E27FC236}">
-                <a16:creationId xmlns:a16="http://schemas.microsoft.com/office/drawing/2014/main" id="{4D4E6FB5-3830-2CB2-413C-BED0D367E193}"/>
-              </a:ext>
-            </a:extLst>
-          </p:cNvPr>
-          <p:cNvSpPr txBox="1"/>
+          <p:cNvPr id="10" name="Cím 1">
+            <a:extLst>
+              <a:ext uri="{FF2B5EF4-FFF2-40B4-BE49-F238E27FC236}">
+                <a16:creationId xmlns:a16="http://schemas.microsoft.com/office/drawing/2014/main" id="{652FA4C7-BB99-0741-93BA-E0B5428CF6ED}"/>
+              </a:ext>
+            </a:extLst>
+          </p:cNvPr>
+          <p:cNvSpPr txBox="1">
+            <a:spLocks/>
+          </p:cNvSpPr>
           <p:nvPr/>
         </p:nvSpPr>
         <p:spPr>
           <a:xfrm>
-            <a:off x="619760" y="269566"/>
-            <a:ext cx="7874000" cy="4985980"/>
-          </a:xfrm>
-          <a:prstGeom prst="rect">
-            <a:avLst/>
-          </a:prstGeom>
-          <a:noFill/>
-        </p:spPr>
-        <p:txBody>
-          <a:bodyPr wrap="square">
-            <a:spAutoFit/>
-          </a:bodyPr>
-          <a:lstStyle/>
-          <a:p>
-            <a:pPr marL="0" indent="0" algn="ctr">
-              <a:lnSpc>
-                <a:spcPct val="250000"/>
-              </a:lnSpc>
-              <a:buNone/>
-            </a:pPr>
-            <a:r>
-              <a:rPr lang="hu-HU" sz="4000" b="1" noProof="1">
-                <a:solidFill>
-                  <a:schemeClr val="bg1"/>
-                </a:solidFill>
-              </a:rPr>
-              <a:t>Glázer Ármin Dominik </a:t>
-            </a:r>
-            <a:r>
-              <a:rPr lang="hu-HU" sz="4000" noProof="1">
-                <a:solidFill>
-                  <a:schemeClr val="bg1"/>
-                </a:solidFill>
-              </a:rPr>
-              <a:t>- 42 commit</a:t>
-            </a:r>
-          </a:p>
-          <a:p>
-            <a:pPr marL="0" indent="0" algn="ctr">
-              <a:lnSpc>
-                <a:spcPct val="250000"/>
-              </a:lnSpc>
-              <a:buNone/>
-            </a:pPr>
-            <a:r>
-              <a:rPr lang="hu-HU" sz="4000" b="1" noProof="1">
-                <a:solidFill>
-                  <a:schemeClr val="bg1"/>
-                </a:solidFill>
-              </a:rPr>
-              <a:t>Boksay Levente </a:t>
-            </a:r>
-            <a:r>
-              <a:rPr lang="hu-HU" sz="4000" noProof="1">
-                <a:solidFill>
-                  <a:schemeClr val="bg1"/>
-                </a:solidFill>
-              </a:rPr>
-              <a:t>- 70 commit</a:t>
-            </a:r>
-          </a:p>
-          <a:p>
-            <a:pPr marL="0" indent="0" algn="ctr">
-              <a:lnSpc>
-                <a:spcPct val="250000"/>
-              </a:lnSpc>
-              <a:buNone/>
-            </a:pPr>
-            <a:r>
-              <a:rPr lang="hu-HU" sz="4000" b="1" noProof="1">
-                <a:solidFill>
-                  <a:schemeClr val="bg1"/>
-                </a:solidFill>
-              </a:rPr>
-              <a:t>Győr Norbert </a:t>
-            </a:r>
-            <a:r>
-              <a:rPr lang="hu-HU" sz="4000" noProof="1">
-                <a:solidFill>
-                  <a:schemeClr val="bg1"/>
-                </a:solidFill>
-              </a:rPr>
-              <a:t>- 17 commit</a:t>
-            </a:r>
-          </a:p>
-          <a:p>
-            <a:pPr marL="0" indent="0" algn="ctr">
-              <a:buNone/>
-            </a:pPr>
-            <a:endParaRPr lang="hu-HU" spc="300" dirty="0"/>
-          </a:p>
-        </p:txBody>
-      </p:sp>
-      <p:sp>
-        <p:nvSpPr>
-          <p:cNvPr id="10" name="Cím 1">
-            <a:extLst>
-              <a:ext uri="{FF2B5EF4-FFF2-40B4-BE49-F238E27FC236}">
-                <a16:creationId xmlns:a16="http://schemas.microsoft.com/office/drawing/2014/main" id="{652FA4C7-BB99-0741-93BA-E0B5428CF6ED}"/>
-              </a:ext>
-            </a:extLst>
-          </p:cNvPr>
-          <p:cNvSpPr txBox="1">
-            <a:spLocks/>
-          </p:cNvSpPr>
-          <p:nvPr/>
-        </p:nvSpPr>
-        <p:spPr>
-          <a:xfrm>
-            <a:off x="4556760" y="2106220"/>
+            <a:off x="2890922" y="287528"/>
             <a:ext cx="10515601" cy="1312672"/>
           </a:xfrm>
           <a:prstGeom prst="rect">
@@ -4450,17 +4394,176 @@
           </a:lstStyle>
           <a:p>
             <a:r>
-              <a:rPr lang="hu-HU" sz="6600" b="1" dirty="0" err="1">
+              <a:rPr lang="hu-HU" sz="6600" b="1" dirty="0">
                 <a:solidFill>
                   <a:schemeClr val="bg1"/>
                 </a:solidFill>
                 <a:latin typeface="+mn-lt"/>
               </a:rPr>
-              <a:t>Készítőkröl</a:t>
+              <a:t>Készítőkről</a:t>
             </a:r>
             <a:endParaRPr lang="hu-HU" sz="6600" b="1" dirty="0">
               <a:latin typeface="+mn-lt"/>
             </a:endParaRPr>
+          </a:p>
+        </p:txBody>
+      </p:sp>
+      <p:sp>
+        <p:nvSpPr>
+          <p:cNvPr id="2" name="Téglalap 1">
+            <a:extLst>
+              <a:ext uri="{FF2B5EF4-FFF2-40B4-BE49-F238E27FC236}">
+                <a16:creationId xmlns:a16="http://schemas.microsoft.com/office/drawing/2014/main" id="{7CB7B604-376A-4F96-ACBB-82BAF5E367A3}"/>
+              </a:ext>
+            </a:extLst>
+          </p:cNvPr>
+          <p:cNvSpPr/>
+          <p:nvPr/>
+        </p:nvSpPr>
+        <p:spPr>
+          <a:xfrm>
+            <a:off x="5260063" y="3811509"/>
+            <a:ext cx="4291343" cy="1446291"/>
+          </a:xfrm>
+          <a:prstGeom prst="rect">
+            <a:avLst/>
+          </a:prstGeom>
+          <a:solidFill>
+            <a:schemeClr val="tx1"/>
+          </a:solidFill>
+          <a:ln>
+            <a:noFill/>
+          </a:ln>
+        </p:spPr>
+        <p:style>
+          <a:lnRef idx="2">
+            <a:schemeClr val="accent1">
+              <a:shade val="50000"/>
+            </a:schemeClr>
+          </a:lnRef>
+          <a:fillRef idx="1">
+            <a:schemeClr val="accent1"/>
+          </a:fillRef>
+          <a:effectRef idx="0">
+            <a:schemeClr val="accent1"/>
+          </a:effectRef>
+          <a:fontRef idx="minor">
+            <a:schemeClr val="lt1"/>
+          </a:fontRef>
+        </p:style>
+        <p:txBody>
+          <a:bodyPr rtlCol="0" anchor="ctr"/>
+          <a:lstStyle/>
+          <a:p>
+            <a:pPr algn="ctr"/>
+            <a:endParaRPr lang="hu-HU"/>
+          </a:p>
+        </p:txBody>
+      </p:sp>
+      <p:sp>
+        <p:nvSpPr>
+          <p:cNvPr id="7" name="Szövegdoboz 6">
+            <a:extLst>
+              <a:ext uri="{FF2B5EF4-FFF2-40B4-BE49-F238E27FC236}">
+                <a16:creationId xmlns:a16="http://schemas.microsoft.com/office/drawing/2014/main" id="{4D4E6FB5-3830-2CB2-413C-BED0D367E193}"/>
+              </a:ext>
+            </a:extLst>
+          </p:cNvPr>
+          <p:cNvSpPr txBox="1"/>
+          <p:nvPr/>
+        </p:nvSpPr>
+        <p:spPr>
+          <a:xfrm>
+            <a:off x="4009947" y="1455425"/>
+            <a:ext cx="7874000" cy="4985980"/>
+          </a:xfrm>
+          <a:prstGeom prst="rect">
+            <a:avLst/>
+          </a:prstGeom>
+          <a:noFill/>
+        </p:spPr>
+        <p:txBody>
+          <a:bodyPr wrap="square">
+            <a:spAutoFit/>
+          </a:bodyPr>
+          <a:lstStyle/>
+          <a:p>
+            <a:pPr marL="0" indent="0" algn="ctr">
+              <a:lnSpc>
+                <a:spcPct val="250000"/>
+              </a:lnSpc>
+              <a:buNone/>
+            </a:pPr>
+            <a:r>
+              <a:rPr lang="hu-HU" sz="4000" b="1" noProof="1">
+                <a:solidFill>
+                  <a:schemeClr val="bg1"/>
+                </a:solidFill>
+              </a:rPr>
+              <a:t>Glázer Ármin Dominik </a:t>
+            </a:r>
+            <a:r>
+              <a:rPr lang="hu-HU" sz="4000" noProof="1">
+                <a:solidFill>
+                  <a:schemeClr val="bg1"/>
+                </a:solidFill>
+              </a:rPr>
+              <a:t>- 42 commit</a:t>
+            </a:r>
+          </a:p>
+          <a:p>
+            <a:pPr marL="0" indent="0" algn="ctr">
+              <a:lnSpc>
+                <a:spcPct val="250000"/>
+              </a:lnSpc>
+              <a:buNone/>
+            </a:pPr>
+            <a:r>
+              <a:rPr lang="hu-HU" sz="4000" b="1" noProof="1">
+                <a:solidFill>
+                  <a:schemeClr val="bg1"/>
+                </a:solidFill>
+              </a:rPr>
+              <a:t>Boksay Levente </a:t>
+            </a:r>
+            <a:r>
+              <a:rPr lang="hu-HU" sz="4000" noProof="1">
+                <a:solidFill>
+                  <a:schemeClr val="bg1"/>
+                </a:solidFill>
+              </a:rPr>
+              <a:t>- 70 commit</a:t>
+            </a:r>
+          </a:p>
+          <a:p>
+            <a:pPr marL="0" indent="0" algn="ctr">
+              <a:lnSpc>
+                <a:spcPct val="250000"/>
+              </a:lnSpc>
+              <a:buNone/>
+            </a:pPr>
+            <a:r>
+              <a:rPr lang="hu-HU" sz="4000" b="1" noProof="1">
+                <a:solidFill>
+                  <a:schemeClr val="bg1"/>
+                </a:solidFill>
+              </a:rPr>
+              <a:t>Győr Norbert </a:t>
+            </a:r>
+            <a:r>
+              <a:rPr lang="hu-HU" sz="4000" noProof="1">
+                <a:solidFill>
+                  <a:schemeClr val="bg1"/>
+                </a:solidFill>
+              </a:rPr>
+              <a:t>- 17 commit</a:t>
+            </a:r>
+          </a:p>
+          <a:p>
+            <a:pPr marL="0" indent="0" algn="ctr">
+              <a:buNone/>
+            </a:pPr>
+            <a:endParaRPr lang="hu-HU" spc="300" dirty="0"/>
           </a:p>
         </p:txBody>
       </p:sp>
@@ -4556,7 +4659,7 @@
         </p:blipFill>
         <p:spPr>
           <a:xfrm>
-            <a:off x="-183108" y="-39945"/>
+            <a:off x="-366216" y="0"/>
             <a:ext cx="12558216" cy="6897944"/>
           </a:xfrm>
           <a:prstGeom prst="rect">
@@ -4580,7 +4683,7 @@
         </p:nvSpPr>
         <p:spPr>
           <a:xfrm>
-            <a:off x="2514600" y="2121408"/>
+            <a:off x="3162670" y="-167989"/>
             <a:ext cx="10515601" cy="1312672"/>
           </a:xfrm>
           <a:prstGeom prst="rect">
@@ -4628,6 +4731,58 @@
       </p:sp>
       <p:sp>
         <p:nvSpPr>
+          <p:cNvPr id="2" name="Téglalap 1">
+            <a:extLst>
+              <a:ext uri="{FF2B5EF4-FFF2-40B4-BE49-F238E27FC236}">
+                <a16:creationId xmlns:a16="http://schemas.microsoft.com/office/drawing/2014/main" id="{AB583351-4AD9-4ABD-AE95-4EE6CF170904}"/>
+              </a:ext>
+            </a:extLst>
+          </p:cNvPr>
+          <p:cNvSpPr/>
+          <p:nvPr/>
+        </p:nvSpPr>
+        <p:spPr>
+          <a:xfrm>
+            <a:off x="5069941" y="3429000"/>
+            <a:ext cx="4644427" cy="1828800"/>
+          </a:xfrm>
+          <a:prstGeom prst="rect">
+            <a:avLst/>
+          </a:prstGeom>
+          <a:solidFill>
+            <a:schemeClr val="tx1"/>
+          </a:solidFill>
+          <a:ln>
+            <a:noFill/>
+          </a:ln>
+        </p:spPr>
+        <p:style>
+          <a:lnRef idx="2">
+            <a:schemeClr val="accent1">
+              <a:shade val="50000"/>
+            </a:schemeClr>
+          </a:lnRef>
+          <a:fillRef idx="1">
+            <a:schemeClr val="accent1"/>
+          </a:fillRef>
+          <a:effectRef idx="0">
+            <a:schemeClr val="accent1"/>
+          </a:effectRef>
+          <a:fontRef idx="minor">
+            <a:schemeClr val="lt1"/>
+          </a:fontRef>
+        </p:style>
+        <p:txBody>
+          <a:bodyPr rtlCol="0" anchor="ctr"/>
+          <a:lstStyle/>
+          <a:p>
+            <a:pPr algn="ctr"/>
+            <a:endParaRPr lang="hu-HU" dirty="0"/>
+          </a:p>
+        </p:txBody>
+      </p:sp>
+      <p:sp>
+        <p:nvSpPr>
           <p:cNvPr id="4" name="Szövegdoboz 3">
             <a:extLst>
               <a:ext uri="{FF2B5EF4-FFF2-40B4-BE49-F238E27FC236}">
@@ -4640,7 +4795,7 @@
         </p:nvSpPr>
         <p:spPr>
           <a:xfrm>
-            <a:off x="620216" y="960825"/>
+            <a:off x="6330384" y="1144683"/>
             <a:ext cx="7721600" cy="4896405"/>
           </a:xfrm>
           <a:prstGeom prst="rect">
@@ -4717,89 +4872,6 @@
 </file>
 
 <file path=ppt/slides/slide5.xml><?xml version="1.0" encoding="utf-8"?>
-<p:sld xmlns:a="http://schemas.openxmlformats.org/drawingml/2006/main" xmlns:r="http://schemas.openxmlformats.org/officeDocument/2006/relationships" xmlns:p="http://schemas.openxmlformats.org/presentationml/2006/main">
-  <p:cSld>
-    <p:spTree>
-      <p:nvGrpSpPr>
-        <p:cNvPr id="1" name=""/>
-        <p:cNvGrpSpPr/>
-        <p:nvPr/>
-      </p:nvGrpSpPr>
-      <p:grpSpPr>
-        <a:xfrm>
-          <a:off x="0" y="0"/>
-          <a:ext cx="0" cy="0"/>
-          <a:chOff x="0" y="0"/>
-          <a:chExt cx="0" cy="0"/>
-        </a:xfrm>
-      </p:grpSpPr>
-      <p:sp>
-        <p:nvSpPr>
-          <p:cNvPr id="2" name="Cím 1">
-            <a:extLst>
-              <a:ext uri="{FF2B5EF4-FFF2-40B4-BE49-F238E27FC236}">
-                <a16:creationId xmlns:a16="http://schemas.microsoft.com/office/drawing/2014/main" id="{41F2EE23-0876-D30E-6AC7-12AE89683983}"/>
-              </a:ext>
-            </a:extLst>
-          </p:cNvPr>
-          <p:cNvSpPr>
-            <a:spLocks noGrp="1"/>
-          </p:cNvSpPr>
-          <p:nvPr>
-            <p:ph type="ctrTitle"/>
-          </p:nvPr>
-        </p:nvSpPr>
-        <p:spPr/>
-        <p:txBody>
-          <a:bodyPr/>
-          <a:lstStyle/>
-          <a:p>
-            <a:endParaRPr lang="hu-HU" dirty="0"/>
-          </a:p>
-        </p:txBody>
-      </p:sp>
-      <p:sp>
-        <p:nvSpPr>
-          <p:cNvPr id="3" name="Alcím 2">
-            <a:extLst>
-              <a:ext uri="{FF2B5EF4-FFF2-40B4-BE49-F238E27FC236}">
-                <a16:creationId xmlns:a16="http://schemas.microsoft.com/office/drawing/2014/main" id="{92F4B834-72AC-5ADE-8E72-A7F9CA15F207}"/>
-              </a:ext>
-            </a:extLst>
-          </p:cNvPr>
-          <p:cNvSpPr>
-            <a:spLocks noGrp="1"/>
-          </p:cNvSpPr>
-          <p:nvPr>
-            <p:ph type="subTitle" idx="1"/>
-          </p:nvPr>
-        </p:nvSpPr>
-        <p:spPr/>
-        <p:txBody>
-          <a:bodyPr/>
-          <a:lstStyle/>
-          <a:p>
-            <a:endParaRPr lang="hu-HU"/>
-          </a:p>
-        </p:txBody>
-      </p:sp>
-    </p:spTree>
-    <p:extLst>
-      <p:ext uri="{BB962C8B-B14F-4D97-AF65-F5344CB8AC3E}">
-        <p14:creationId xmlns:p14="http://schemas.microsoft.com/office/powerpoint/2010/main" val="2041281869"/>
-      </p:ext>
-    </p:extLst>
-  </p:cSld>
-  <p:clrMapOvr>
-    <a:masterClrMapping/>
-  </p:clrMapOvr>
-  <p:transition spd="slow">
-    <p:push dir="u"/>
-  </p:transition>
-</p:sld>
-</file>
-
-<file path=ppt/slides/slide6.xml><?xml version="1.0" encoding="utf-8"?>
 <p:sld xmlns:a="http://schemas.openxmlformats.org/drawingml/2006/main" xmlns:r="http://schemas.openxmlformats.org/officeDocument/2006/relationships" xmlns:p="http://schemas.openxmlformats.org/presentationml/2006/main">
   <p:cSld>
     <p:spTree>
